--- a/apps/workshopper/backend/src/main/resources/templates/workshopper-default.pptx
+++ b/apps/workshopper/backend/src/main/resources/templates/workshopper-default.pptx
@@ -13,14 +13,13 @@
     <p:sldId id="257" r:id="rId6"/>
     <p:sldId id="270" r:id="rId7"/>
     <p:sldId id="259" r:id="rId8"/>
-    <p:sldId id="260" r:id="rId9"/>
-    <p:sldId id="268" r:id="rId10"/>
-    <p:sldId id="267" r:id="rId11"/>
-    <p:sldId id="262" r:id="rId12"/>
-    <p:sldId id="269" r:id="rId13"/>
-    <p:sldId id="264" r:id="rId14"/>
-    <p:sldId id="258" r:id="rId15"/>
-    <p:sldId id="265" r:id="rId16"/>
+    <p:sldId id="268" r:id="rId9"/>
+    <p:sldId id="267" r:id="rId10"/>
+    <p:sldId id="262" r:id="rId11"/>
+    <p:sldId id="269" r:id="rId12"/>
+    <p:sldId id="264" r:id="rId13"/>
+    <p:sldId id="258" r:id="rId14"/>
+    <p:sldId id="265" r:id="rId15"/>
   </p:sldIdLst>
   <p:sldSz cx="12192000" cy="6858000"/>
   <p:notesSz cx="6858000" cy="12192000"/>
@@ -594,7 +593,7 @@
           <a:p>
             <a:r>
               <a:rPr lang="en-US" dirty="0"/>
-              <a:t>Layout: lecture_placeholder — Marks where instructor-led lecture content belongs. Replace the placeholder box with your own slides/diagrams/notes; this layout is deliberately left generic.</a:t>
+              <a:t>Layout: summary — General-purpose slide for a welcome message or a bulleted summary. Swap the eyebrow/title and bullet text for your content.</a:t>
             </a:r>
             <a:endParaRPr lang="en-US" dirty="0"/>
           </a:p>
@@ -676,88 +675,6 @@
           <a:p>
             <a:r>
               <a:rPr lang="en-US" dirty="0"/>
-              <a:t>Layout: summary — General-purpose slide for a welcome message or a bulleted summary. Swap the eyebrow/title and bullet text for your content.</a:t>
-            </a:r>
-            <a:endParaRPr lang="en-US" dirty="0"/>
-          </a:p>
-        </p:txBody>
-      </p:sp>
-      <p:sp>
-        <p:nvSpPr>
-          <p:cNvPr id="4" name="Slide Number Placeholder 3"/>
-          <p:cNvSpPr>
-            <a:spLocks noGrp="1"/>
-          </p:cNvSpPr>
-          <p:nvPr>
-            <p:ph type="sldNum" sz="quarter" idx="10"/>
-          </p:nvPr>
-        </p:nvSpPr>
-        <p:spPr/>
-        <p:txBody>
-          <a:bodyPr/>
-          <a:lstStyle/>
-          <a:p>
-            <a:fld id="{F7021451-1387-4CA6-816F-3879F97B5CBC}" type="slidenum">
-              <a:rPr lang="en-US"/>
-            </a:fld>
-            <a:endParaRPr lang="en-US"/>
-          </a:p>
-        </p:txBody>
-      </p:sp>
-    </p:spTree>
-  </p:cSld>
-  <p:clrMapOvr>
-    <a:masterClrMapping/>
-  </p:clrMapOvr>
-</p:notes>
-</file>
-
-<file path=ppt/notesSlides/notesSlide12.xml><?xml version="1.0" encoding="utf-8"?>
-<p:notes xmlns:a="http://schemas.openxmlformats.org/drawingml/2006/main" xmlns:r="http://schemas.openxmlformats.org/officeDocument/2006/relationships" xmlns:p="http://schemas.openxmlformats.org/presentationml/2006/main">
-  <p:cSld>
-    <p:spTree>
-      <p:nvGrpSpPr>
-        <p:cNvPr id="1" name=""/>
-        <p:cNvGrpSpPr/>
-        <p:nvPr/>
-      </p:nvGrpSpPr>
-      <p:grpSpPr>
-        <a:xfrm>
-          <a:off x="0" y="0"/>
-          <a:ext cx="0" cy="0"/>
-          <a:chOff x="0" y="0"/>
-          <a:chExt cx="0" cy="0"/>
-        </a:xfrm>
-      </p:grpSpPr>
-      <p:sp>
-        <p:nvSpPr>
-          <p:cNvPr id="2" name="Slide Image Placeholder 1"/>
-          <p:cNvSpPr>
-            <a:spLocks noGrp="1" noRot="1" noChangeAspect="1"/>
-          </p:cNvSpPr>
-          <p:nvPr>
-            <p:ph type="sldImg"/>
-          </p:nvPr>
-        </p:nvSpPr>
-        <p:spPr/>
-      </p:sp>
-      <p:sp>
-        <p:nvSpPr>
-          <p:cNvPr id="3" name="Notes Placeholder 2"/>
-          <p:cNvSpPr>
-            <a:spLocks noGrp="1"/>
-          </p:cNvSpPr>
-          <p:nvPr>
-            <p:ph type="body" idx="1"/>
-          </p:nvPr>
-        </p:nvSpPr>
-        <p:spPr/>
-        <p:txBody>
-          <a:bodyPr/>
-          <a:lstStyle/>
-          <a:p>
-            <a:r>
-              <a:rPr lang="en-US" dirty="0"/>
               <a:t>Layout: break — Standalone break slide. Set the duration and optionally add a room number or return time.</a:t>
             </a:r>
             <a:endParaRPr lang="en-US" dirty="0"/>
@@ -1213,11 +1130,15 @@
           <a:lstStyle/>
           <a:p>
             <a:r>
-              <a:rPr lang="en-US" dirty="0"/>
-              <a:t>Layout: activity_tiled — Used for </a:t>
+              <a:rPr lang="en-US" dirty="0">
+                <a:sym typeface="+mn-ea"/>
+              </a:rPr>
+              <a:t>Layout: activity_sidebar — Used for </a:t>
             </a:r>
             <a:br>
-              <a:rPr lang="en-US" dirty="0"/>
+              <a:rPr lang="en-US" dirty="0">
+                <a:sym typeface="+mn-ea"/>
+              </a:rPr>
             </a:br>
             <a:r>
               <a:rPr lang="zh-CN" altLang="en-US" b="1" kern="0" spc="150" dirty="0">
@@ -1247,80 +1168,33 @@
               <a:t>GROUP DISCUSSION</a:t>
             </a:r>
             <a:r>
-              <a:rPr lang="en-US" dirty="0"/>
+              <a:rPr lang="en-US" dirty="0">
+                <a:sym typeface="+mn-ea"/>
+              </a:rPr>
               <a:t>, </a:t>
             </a:r>
             <a:br>
-              <a:rPr lang="en-US" dirty="0"/>
+              <a:rPr lang="en-US" dirty="0">
+                <a:sym typeface="+mn-ea"/>
+              </a:rPr>
             </a:br>
             <a:r>
-              <a:rPr lang="zh-CN" altLang="en-US" dirty="0"/>
+              <a:rPr lang="zh-CN" altLang="en-US" dirty="0">
+                <a:sym typeface="+mn-ea"/>
+              </a:rPr>
               <a:t>🗣️</a:t>
             </a:r>
             <a:r>
-              <a:rPr lang="en-US" altLang="zh-CN" dirty="0"/>
+              <a:rPr lang="en-US" altLang="zh-CN" dirty="0">
+                <a:sym typeface="+mn-ea"/>
+              </a:rPr>
               <a:t>  </a:t>
-            </a:r>
-            <a:r>
-              <a:rPr lang="en-US" b="1" dirty="0"/>
-              <a:t>Debate </a:t>
-            </a:r>
-            <a:br>
-              <a:rPr lang="en-US" b="1" dirty="0"/>
-            </a:br>
-            <a:r>
-              <a:rPr lang="zh-CN" altLang="en-US" b="1" dirty="0"/>
-              <a:t>👥</a:t>
-            </a:r>
-            <a:r>
-              <a:rPr lang="en-US" altLang="zh-CN" b="1" dirty="0"/>
-              <a:t>  </a:t>
-            </a:r>
-            <a:r>
-              <a:rPr lang="en-US" b="1" dirty="0"/>
-              <a:t>Peer Review</a:t>
-            </a:r>
-            <a:endParaRPr lang="en-US" b="1" dirty="0"/>
-          </a:p>
-          <a:p>
-            <a:r>
-              <a:rPr lang="zh-CN" altLang="en-US" b="1" dirty="0"/>
-              <a:t>🎭</a:t>
-            </a:r>
-            <a:r>
-              <a:rPr lang="en-US" altLang="zh-CN" b="1" dirty="0"/>
-              <a:t>  </a:t>
-            </a:r>
-            <a:r>
-              <a:rPr lang="en-US" b="1" dirty="0"/>
-              <a:t>Role Play</a:t>
-            </a:r>
-            <a:endParaRPr lang="en-US" b="1" dirty="0"/>
-          </a:p>
-          <a:p>
-            <a:r>
-              <a:rPr lang="zh-CN" altLang="en-US" b="1" kern="0" spc="150" dirty="0">
-                <a:latin typeface="Inter" pitchFamily="34" charset="0"/>
-                <a:ea typeface="Inter" pitchFamily="34" charset="-122"/>
-                <a:cs typeface="Inter" pitchFamily="34" charset="-120"/>
-                <a:sym typeface="+mn-ea"/>
-              </a:rPr>
-              <a:t>💼</a:t>
-            </a:r>
-            <a:r>
-              <a:rPr lang="en-US" b="1" kern="0" spc="150" dirty="0">
-                <a:latin typeface="Inter" pitchFamily="34" charset="0"/>
-                <a:ea typeface="Inter" pitchFamily="34" charset="-122"/>
-                <a:cs typeface="Inter" pitchFamily="34" charset="-120"/>
-                <a:sym typeface="+mn-ea"/>
-              </a:rPr>
-              <a:t> </a:t>
             </a:r>
             <a:r>
               <a:rPr lang="en-US" b="1" dirty="0">
                 <a:sym typeface="+mn-ea"/>
               </a:rPr>
-              <a:t>CASE STUDY</a:t>
+              <a:t>Debate </a:t>
             </a:r>
             <a:br>
               <a:rPr lang="en-US" b="1" dirty="0">
@@ -1331,7 +1205,7 @@
               <a:rPr lang="zh-CN" altLang="en-US" b="1" dirty="0">
                 <a:sym typeface="+mn-ea"/>
               </a:rPr>
-              <a:t>🗺</a:t>
+              <a:t>👥</a:t>
             </a:r>
             <a:r>
               <a:rPr lang="en-US" altLang="zh-CN" b="1" dirty="0">
@@ -1343,16 +1217,117 @@
               <a:rPr lang="en-US" b="1" dirty="0">
                 <a:sym typeface="+mn-ea"/>
               </a:rPr>
+              <a:t>Peer Review</a:t>
+            </a:r>
+            <a:endParaRPr lang="en-US" b="1" dirty="0"/>
+          </a:p>
+          <a:p>
+            <a:r>
+              <a:rPr lang="zh-CN" altLang="en-US" b="1" dirty="0">
+                <a:sym typeface="+mn-ea"/>
+              </a:rPr>
+              <a:t>🎭</a:t>
+            </a:r>
+            <a:r>
+              <a:rPr lang="en-US" altLang="zh-CN" b="1" dirty="0">
+                <a:sym typeface="+mn-ea"/>
+              </a:rPr>
+              <a:t>  </a:t>
+            </a:r>
+            <a:r>
+              <a:rPr lang="en-US" b="1" dirty="0">
+                <a:sym typeface="+mn-ea"/>
+              </a:rPr>
+              <a:t>Role Play</a:t>
+            </a:r>
+            <a:endParaRPr lang="en-US" b="1" dirty="0"/>
+          </a:p>
+          <a:p>
+            <a:r>
+              <a:rPr lang="zh-CN" altLang="en-US" b="1" kern="0" spc="150" dirty="0">
+                <a:latin typeface="Inter" pitchFamily="34" charset="0"/>
+                <a:ea typeface="Inter" pitchFamily="34" charset="-122"/>
+                <a:cs typeface="Inter" pitchFamily="34" charset="-120"/>
+                <a:sym typeface="+mn-ea"/>
+              </a:rPr>
+              <a:t>💼</a:t>
+            </a:r>
+            <a:r>
+              <a:rPr lang="en-US" b="1" kern="0" spc="150" dirty="0">
+                <a:latin typeface="Inter" pitchFamily="34" charset="0"/>
+                <a:ea typeface="Inter" pitchFamily="34" charset="-122"/>
+                <a:cs typeface="Inter" pitchFamily="34" charset="-120"/>
+                <a:sym typeface="+mn-ea"/>
+              </a:rPr>
+              <a:t> </a:t>
+            </a:r>
+            <a:r>
+              <a:rPr lang="en-US" b="1" dirty="0">
+                <a:sym typeface="+mn-ea"/>
+              </a:rPr>
+              <a:t>CASE STUDY</a:t>
+            </a:r>
+            <a:br>
+              <a:rPr lang="en-US" b="1" dirty="0">
+                <a:sym typeface="+mn-ea"/>
+              </a:rPr>
+            </a:br>
+            <a:r>
+              <a:rPr lang="zh-CN" altLang="en-US" b="1" dirty="0">
+                <a:sym typeface="+mn-ea"/>
+              </a:rPr>
+              <a:t>🗺</a:t>
+            </a:r>
+            <a:r>
+              <a:rPr lang="en-US" altLang="zh-CN" b="1" dirty="0">
+                <a:sym typeface="+mn-ea"/>
+              </a:rPr>
+              <a:t>  </a:t>
+            </a:r>
+            <a:r>
+              <a:rPr lang="en-US" b="1" dirty="0">
+                <a:sym typeface="+mn-ea"/>
+              </a:rPr>
               <a:t>CONCEPT MAPPING</a:t>
             </a:r>
+            <a:endParaRPr lang="en-US" b="1" dirty="0">
+              <a:sym typeface="+mn-ea"/>
+            </a:endParaRPr>
+          </a:p>
+          <a:p>
+            <a:r>
+              <a:rPr lang="en-US" dirty="0">
+                <a:solidFill>
+                  <a:srgbClr val="000000"/>
+                </a:solidFill>
+                <a:latin typeface="Inter" pitchFamily="34" charset="0"/>
+                <a:ea typeface="Inter" pitchFamily="34" charset="-122"/>
+                <a:cs typeface="Inter" pitchFamily="34" charset="-120"/>
+                <a:sym typeface="+mn-ea"/>
+              </a:rPr>
+              <a:t>🛠️  </a:t>
+            </a:r>
+            <a:r>
+              <a:rPr lang="en-US" b="1" kern="0" spc="150" dirty="0">
+                <a:latin typeface="Inter" pitchFamily="34" charset="0"/>
+                <a:ea typeface="Inter" pitchFamily="34" charset="-122"/>
+                <a:cs typeface="Inter" pitchFamily="34" charset="-120"/>
+                <a:sym typeface="+mn-ea"/>
+              </a:rPr>
+              <a:t>HANDS-ON PRACTICE</a:t>
+            </a:r>
             <a:br>
-              <a:rPr lang="en-US" dirty="0"/>
+              <a:rPr lang="en-US" dirty="0">
+                <a:sym typeface="+mn-ea"/>
+              </a:rPr>
             </a:br>
             <a:r>
-              <a:rPr lang="en-US" dirty="0"/>
+              <a:rPr lang="en-US" dirty="0">
+                <a:sym typeface="+mn-ea"/>
+              </a:rPr>
               <a:t>a prompt card plus two supporting tiles (e.g. logistics + deliverable). Duplicate and relabel the tiles as needed.</a:t>
             </a:r>
-            <a:endParaRPr lang="en-US" dirty="0"/>
+            <a:endParaRPr lang="en-US" b="1" dirty="0"/>
           </a:p>
         </p:txBody>
       </p:sp>
@@ -1432,36 +1407,37 @@
           <a:p>
             <a:r>
               <a:rPr lang="en-US" dirty="0"/>
-              <a:t>Layout: activity_sidebar </a:t>
+              <a:t>Layout: activity_sidebar — Used for </a:t>
+            </a:r>
+            <a:r>
+              <a:rPr lang="en-US" dirty="0">
+                <a:solidFill>
+                  <a:srgbClr val="000000"/>
+                </a:solidFill>
+                <a:latin typeface="Inter" pitchFamily="34" charset="0"/>
+                <a:ea typeface="Inter" pitchFamily="34" charset="-122"/>
+                <a:cs typeface="Inter" pitchFamily="34" charset="-120"/>
+                <a:sym typeface="+mn-ea"/>
+              </a:rPr>
+              <a:t>🙋  </a:t>
+            </a:r>
+            <a:r>
+              <a:rPr lang="en-US" b="1" kern="0" spc="150" dirty="0">
+                <a:solidFill>
+                  <a:srgbClr val="2563EB"/>
+                </a:solidFill>
+                <a:latin typeface="Inter" pitchFamily="34" charset="0"/>
+                <a:ea typeface="Inter" pitchFamily="34" charset="-122"/>
+                <a:cs typeface="Inter" pitchFamily="34" charset="-120"/>
+                <a:sym typeface="+mn-ea"/>
+              </a:rPr>
+              <a:t>Q&amp;A SESSION</a:t>
+            </a:r>
+            <a:r>
+              <a:rPr lang="en-US" dirty="0"/>
+              <a:t>, One Minute Paper</a:t>
             </a:r>
             <a:endParaRPr lang="en-US" dirty="0"/>
-          </a:p>
-          <a:p>
-            <a:r>
-              <a:rPr lang="en-US" dirty="0">
-                <a:solidFill>
-                  <a:srgbClr val="000000"/>
-                </a:solidFill>
-                <a:latin typeface="Inter" pitchFamily="34" charset="0"/>
-                <a:ea typeface="Inter" pitchFamily="34" charset="-122"/>
-                <a:cs typeface="Inter" pitchFamily="34" charset="-120"/>
-                <a:sym typeface="+mn-ea"/>
-              </a:rPr>
-              <a:t>🛠️  </a:t>
-            </a:r>
-            <a:r>
-              <a:rPr lang="en-US" b="1" kern="0" spc="150" dirty="0">
-                <a:latin typeface="Inter" pitchFamily="34" charset="0"/>
-                <a:ea typeface="Inter" pitchFamily="34" charset="-122"/>
-                <a:cs typeface="Inter" pitchFamily="34" charset="-120"/>
-                <a:sym typeface="+mn-ea"/>
-              </a:rPr>
-              <a:t>HANDS-ON PRACTICE</a:t>
-            </a:r>
-            <a:endParaRPr lang="en-US" b="1" dirty="0"/>
-          </a:p>
-          <a:p>
-            <a:endParaRPr lang="en-US" b="1" dirty="0"/>
           </a:p>
         </p:txBody>
       </p:sp>
@@ -1541,35 +1517,14 @@
           <a:p>
             <a:r>
               <a:rPr lang="en-US" dirty="0"/>
-              <a:t>Layout: activity_sidebar — Used for </a:t>
-            </a:r>
-            <a:r>
-              <a:rPr lang="en-US" dirty="0">
-                <a:solidFill>
-                  <a:srgbClr val="000000"/>
-                </a:solidFill>
-                <a:latin typeface="Inter" pitchFamily="34" charset="0"/>
-                <a:ea typeface="Inter" pitchFamily="34" charset="-122"/>
-                <a:cs typeface="Inter" pitchFamily="34" charset="-120"/>
-                <a:sym typeface="+mn-ea"/>
-              </a:rPr>
-              <a:t>🙋  </a:t>
-            </a:r>
-            <a:r>
-              <a:rPr lang="en-US" b="1" kern="0" spc="150" dirty="0">
-                <a:solidFill>
-                  <a:srgbClr val="2563EB"/>
-                </a:solidFill>
-                <a:latin typeface="Inter" pitchFamily="34" charset="0"/>
-                <a:ea typeface="Inter" pitchFamily="34" charset="-122"/>
-                <a:cs typeface="Inter" pitchFamily="34" charset="-120"/>
-                <a:sym typeface="+mn-ea"/>
-              </a:rPr>
-              <a:t>Q&amp;A SESSION</a:t>
-            </a:r>
-            <a:r>
+              <a:t>Layout: live_poll — Used for quiz or poll questions with lettered options. </a:t>
+            </a:r>
+            <a:br>
               <a:rPr lang="en-US" dirty="0"/>
-              <a:t>, One Minute Paper</a:t>
+            </a:br>
+            <a:r>
+              <a:rPr lang="en-US" dirty="0"/>
+              <a:t>Add/remove option rows as needed (3 or 4 tends to fit best).</a:t>
             </a:r>
             <a:endParaRPr lang="en-US" dirty="0"/>
           </a:p>
@@ -1651,14 +1606,7 @@
           <a:p>
             <a:r>
               <a:rPr lang="en-US" dirty="0"/>
-              <a:t>Layout: live_poll — Used for quiz or poll questions with lettered options. </a:t>
-            </a:r>
-            <a:br>
-              <a:rPr lang="en-US" dirty="0"/>
-            </a:br>
-            <a:r>
-              <a:rPr lang="en-US" dirty="0"/>
-              <a:t>Add/remove option rows as needed (3 or 4 tends to fit best).</a:t>
+              <a:t>Layout: debrief — Instructor-facing recap that follows an activity slide: suggested answer, common misconceptions, and the key takeaway tied to the learning goal. No participant interaction required — this is a summary you present.</a:t>
             </a:r>
             <a:endParaRPr lang="en-US" dirty="0"/>
           </a:p>
@@ -1740,7 +1688,7 @@
           <a:p>
             <a:r>
               <a:rPr lang="en-US" dirty="0"/>
-              <a:t>Layout: debrief — Instructor-facing recap that follows an activity slide: suggested answer, common misconceptions, and the key takeaway tied to the learning goal. No participant interaction required — this is a summary you present.</a:t>
+              <a:t>Layout: lecture_placeholder — Marks where instructor-led lecture content belongs. Replace the placeholder box with your own slides/diagrams/notes; this layout is deliberately left generic.</a:t>
             </a:r>
             <a:endParaRPr lang="en-US" dirty="0"/>
           </a:p>
@@ -2491,7 +2439,7 @@
               <a:buNone/>
             </a:pPr>
             <a:r>
-              <a:rPr lang="en-US" sz="4600" b="1" dirty="0">
+              <a:rPr lang="en-US" sz="5400" b="1" dirty="0">
                 <a:solidFill>
                   <a:srgbClr val="2C2420"/>
                 </a:solidFill>
@@ -2501,7 +2449,7 @@
               </a:rPr>
               <a:t>[Session Title]</a:t>
             </a:r>
-            <a:endParaRPr lang="en-US" sz="4600" dirty="0"/>
+            <a:endParaRPr lang="en-US" sz="5400" dirty="0"/>
           </a:p>
         </p:txBody>
       </p:sp>
@@ -2605,7 +2553,7 @@
               <a:buNone/>
             </a:pPr>
             <a:r>
-              <a:rPr lang="en-US" sz="1500" dirty="0">
+              <a:rPr lang="en-US" sz="3000" dirty="0">
                 <a:solidFill>
                   <a:srgbClr val="6B6663"/>
                 </a:solidFill>
@@ -2615,7 +2563,7 @@
               </a:rPr>
               <a:t>[Instructor Name]   ·   [Date]   ·   [Duration]</a:t>
             </a:r>
-            <a:endParaRPr lang="en-US" sz="1500" dirty="0"/>
+            <a:endParaRPr lang="en-US" sz="3000" dirty="0"/>
           </a:p>
         </p:txBody>
       </p:sp>
@@ -2654,26 +2602,7 @@
       </p:grpSpPr>
       <p:sp>
         <p:nvSpPr>
-          <p:cNvPr id="2" name="Shape 0"/>
-          <p:cNvSpPr/>
-          <p:nvPr/>
-        </p:nvSpPr>
-        <p:spPr>
-          <a:xfrm>
-            <a:off x="0" y="0"/>
-            <a:ext cx="82296" cy="6858000"/>
-          </a:xfrm>
-          <a:prstGeom prst="rect">
-            <a:avLst/>
-          </a:prstGeom>
-          <a:solidFill>
-            <a:srgbClr val="6D28D9"/>
-          </a:solidFill>
-        </p:spPr>
-      </p:sp>
-      <p:sp>
-        <p:nvSpPr>
-          <p:cNvPr id="3" name="Text 1"/>
+          <p:cNvPr id="2" name="Text 0"/>
           <p:cNvSpPr/>
           <p:nvPr/>
         </p:nvSpPr>
@@ -2695,16 +2624,37 @@
               <a:buNone/>
             </a:pPr>
             <a:r>
+              <a:rPr lang="zh-CN" altLang="en-US" sz="1600" dirty="0">
+                <a:solidFill>
+                  <a:srgbClr val="000000"/>
+                </a:solidFill>
+                <a:latin typeface="Inter" pitchFamily="34" charset="0"/>
+                <a:ea typeface="Inter" pitchFamily="34" charset="-122"/>
+                <a:cs typeface="Inter" pitchFamily="34" charset="-120"/>
+              </a:rPr>
+              <a:t>📝</a:t>
+            </a:r>
+            <a:r>
+              <a:rPr lang="en-US" sz="1600" dirty="0">
+                <a:solidFill>
+                  <a:srgbClr val="000000"/>
+                </a:solidFill>
+                <a:latin typeface="Inter" pitchFamily="34" charset="0"/>
+                <a:ea typeface="Inter" pitchFamily="34" charset="-122"/>
+                <a:cs typeface="Inter" pitchFamily="34" charset="-120"/>
+              </a:rPr>
+              <a:t>  </a:t>
+            </a:r>
+            <a:r>
               <a:rPr lang="en-US" sz="1600" b="1" kern="0" spc="150" dirty="0">
                 <a:solidFill>
-                  <a:srgbClr val="6D28D9"/>
-                </a:solidFill>
-                <a:latin typeface="Inter" pitchFamily="34" charset="0"/>
-                <a:ea typeface="Inter" pitchFamily="34" charset="-122"/>
-                <a:cs typeface="Inter" pitchFamily="34" charset="-120"/>
-                <a:sym typeface="+mn-ea"/>
-              </a:rPr>
-              <a:t>📖 LECTURE</a:t>
+                  <a:srgbClr val="865C1D"/>
+                </a:solidFill>
+                <a:latin typeface="Inter" pitchFamily="34" charset="0"/>
+                <a:ea typeface="Inter" pitchFamily="34" charset="-122"/>
+                <a:cs typeface="Inter" pitchFamily="34" charset="-120"/>
+              </a:rPr>
+              <a:t>SUMMARY</a:t>
             </a:r>
             <a:endParaRPr lang="en-US" sz="1600" dirty="0"/>
           </a:p>
@@ -2712,7 +2662,7 @@
       </p:sp>
       <p:sp>
         <p:nvSpPr>
-          <p:cNvPr id="4" name="Text 2"/>
+          <p:cNvPr id="3" name="Text 1"/>
           <p:cNvSpPr/>
           <p:nvPr/>
         </p:nvSpPr>
@@ -2737,7 +2687,7 @@
               <a:buNone/>
             </a:pPr>
             <a:r>
-              <a:rPr lang="en-US" sz="3000" b="1" dirty="0">
+              <a:rPr lang="en-US" sz="3200" b="1" dirty="0">
                 <a:solidFill>
                   <a:srgbClr val="2C2420"/>
                 </a:solidFill>
@@ -2745,323 +2695,9 @@
                 <a:ea typeface="Playfair Display" pitchFamily="34" charset="-122"/>
                 <a:cs typeface="Playfair Display" pitchFamily="34" charset="-120"/>
               </a:rPr>
-              <a:t>[Placeholder] - [Lecture Topic]</a:t>
-            </a:r>
-            <a:endParaRPr lang="en-US" sz="3000" dirty="0"/>
-          </a:p>
-        </p:txBody>
-      </p:sp>
-      <p:sp>
-        <p:nvSpPr>
-          <p:cNvPr id="5" name="Shape 3"/>
-          <p:cNvSpPr/>
-          <p:nvPr/>
-        </p:nvSpPr>
-        <p:spPr>
-          <a:xfrm>
-            <a:off x="548640" y="1600200"/>
-            <a:ext cx="11094415" cy="4434840"/>
-          </a:xfrm>
-          <a:prstGeom prst="rect">
-            <a:avLst/>
-          </a:prstGeom>
-          <a:solidFill>
-            <a:srgbClr val="F8F7F6"/>
-          </a:solidFill>
-          <a:ln w="19050">
-            <a:solidFill>
-              <a:srgbClr val="6D28D9"/>
-            </a:solidFill>
-            <a:prstDash val="dash"/>
-          </a:ln>
-        </p:spPr>
-      </p:sp>
-      <p:sp>
-        <p:nvSpPr>
-          <p:cNvPr id="6" name="Text 4"/>
-          <p:cNvSpPr/>
-          <p:nvPr/>
-        </p:nvSpPr>
-        <p:spPr>
-          <a:xfrm>
-            <a:off x="548640" y="2971800"/>
-            <a:ext cx="11094415" cy="731520"/>
-          </a:xfrm>
-          <a:prstGeom prst="rect">
-            <a:avLst/>
-          </a:prstGeom>
-          <a:noFill/>
-        </p:spPr>
-        <p:txBody>
-          <a:bodyPr wrap="square" lIns="0" tIns="0" rIns="0" bIns="0" rtlCol="0" anchor="ctr"/>
-          <a:lstStyle/>
-          <a:p>
-            <a:pPr marL="0" indent="0" algn="ctr">
-              <a:buNone/>
-            </a:pPr>
-            <a:r>
-              <a:rPr lang="en-US" sz="3600" dirty="0">
-                <a:solidFill>
-                  <a:srgbClr val="000000"/>
-                </a:solidFill>
-                <a:latin typeface="Inter" pitchFamily="34" charset="0"/>
-                <a:ea typeface="Inter" pitchFamily="34" charset="-122"/>
-                <a:cs typeface="Inter" pitchFamily="34" charset="-120"/>
-              </a:rPr>
-              <a:t>📝</a:t>
-            </a:r>
-            <a:endParaRPr lang="en-US" sz="3600" dirty="0"/>
-          </a:p>
-        </p:txBody>
-      </p:sp>
-      <p:sp>
-        <p:nvSpPr>
-          <p:cNvPr id="7" name="Text 5"/>
-          <p:cNvSpPr/>
-          <p:nvPr/>
-        </p:nvSpPr>
-        <p:spPr>
-          <a:xfrm>
-            <a:off x="1097280" y="3794760"/>
-            <a:ext cx="9997135" cy="457200"/>
-          </a:xfrm>
-          <a:prstGeom prst="rect">
-            <a:avLst/>
-          </a:prstGeom>
-          <a:noFill/>
-        </p:spPr>
-        <p:txBody>
-          <a:bodyPr wrap="square" lIns="0" tIns="0" rIns="0" bIns="0" rtlCol="0" anchor="ctr"/>
-          <a:lstStyle/>
-          <a:p>
-            <a:pPr marL="0" indent="0" algn="ctr">
-              <a:buNone/>
-            </a:pPr>
-            <a:r>
-              <a:rPr lang="en-US" sz="2200" b="1" dirty="0">
-                <a:solidFill>
-                  <a:srgbClr val="2C2420"/>
-                </a:solidFill>
-                <a:latin typeface="Playfair Display" pitchFamily="34" charset="0"/>
-                <a:ea typeface="Playfair Display" pitchFamily="34" charset="-122"/>
-                <a:cs typeface="Playfair Display" pitchFamily="34" charset="-120"/>
-              </a:rPr>
-              <a:t>Instructor content goes here</a:t>
-            </a:r>
-            <a:endParaRPr lang="en-US" sz="2200" dirty="0"/>
-          </a:p>
-        </p:txBody>
-      </p:sp>
-      <p:sp>
-        <p:nvSpPr>
-          <p:cNvPr id="8" name="Text 6"/>
-          <p:cNvSpPr/>
-          <p:nvPr/>
-        </p:nvSpPr>
-        <p:spPr>
-          <a:xfrm>
-            <a:off x="1828800" y="4343400"/>
-            <a:ext cx="8534095" cy="1097280"/>
-          </a:xfrm>
-          <a:prstGeom prst="rect">
-            <a:avLst/>
-          </a:prstGeom>
-          <a:noFill/>
-        </p:spPr>
-        <p:txBody>
-          <a:bodyPr wrap="square" lIns="0" tIns="0" rIns="0" bIns="0" rtlCol="0" anchor="ctr"/>
-          <a:lstStyle/>
-          <a:p>
-            <a:pPr marL="0" indent="0" algn="ctr">
-              <a:lnSpc>
-                <a:spcPct val="135000"/>
-              </a:lnSpc>
-              <a:buNone/>
-            </a:pPr>
-            <a:r>
-              <a:rPr lang="en-US" sz="1400" dirty="0">
-                <a:solidFill>
-                  <a:srgbClr val="6B6663"/>
-                </a:solidFill>
-                <a:latin typeface="Inter" pitchFamily="34" charset="0"/>
-                <a:ea typeface="Inter" pitchFamily="34" charset="-122"/>
-                <a:cs typeface="Inter" pitchFamily="34" charset="-120"/>
-              </a:rPr>
-              <a:t>[Add your own slides, diagrams, code, or speaking notes for this section of the lecture. This placeholder is intentionally left unstyled so it doesn't compete with your material.]</a:t>
-            </a:r>
-            <a:endParaRPr lang="en-US" sz="1400" dirty="0"/>
-          </a:p>
-        </p:txBody>
-      </p:sp>
-      <p:sp>
-        <p:nvSpPr>
-          <p:cNvPr id="9" name="Text 7"/>
-          <p:cNvSpPr/>
-          <p:nvPr/>
-        </p:nvSpPr>
-        <p:spPr>
-          <a:xfrm>
-            <a:off x="8899855" y="6473952"/>
-            <a:ext cx="3108960" cy="274320"/>
-          </a:xfrm>
-          <a:prstGeom prst="rect">
-            <a:avLst/>
-          </a:prstGeom>
-          <a:noFill/>
-        </p:spPr>
-        <p:txBody>
-          <a:bodyPr wrap="square" lIns="0" tIns="0" rIns="0" bIns="0" rtlCol="0" anchor="ctr"/>
-          <a:lstStyle/>
-          <a:p>
-            <a:pPr marL="0" indent="0" algn="r">
-              <a:buNone/>
-            </a:pPr>
-            <a:r>
-              <a:rPr lang="en-US" sz="850" kern="0" spc="50" dirty="0">
-                <a:solidFill>
-                  <a:srgbClr val="6B6663"/>
-                </a:solidFill>
-                <a:latin typeface="Inter" pitchFamily="34" charset="0"/>
-                <a:ea typeface="Inter" pitchFamily="34" charset="-122"/>
-                <a:cs typeface="Inter" pitchFamily="34" charset="-120"/>
-              </a:rPr>
-              <a:t>TEMPLATE  ·  lecture_placeholder</a:t>
-            </a:r>
-            <a:endParaRPr lang="en-US" sz="850" dirty="0"/>
-          </a:p>
-        </p:txBody>
-      </p:sp>
-    </p:spTree>
-  </p:cSld>
-  <p:clrMapOvr>
-    <a:masterClrMapping/>
-  </p:clrMapOvr>
-</p:sld>
-</file>
-
-<file path=ppt/slides/slide11.xml><?xml version="1.0" encoding="utf-8"?>
-<p:sld xmlns:a="http://schemas.openxmlformats.org/drawingml/2006/main" xmlns:r="http://schemas.openxmlformats.org/officeDocument/2006/relationships" xmlns:p="http://schemas.openxmlformats.org/presentationml/2006/main">
-  <p:cSld>
-    <p:bg>
-      <p:bgPr>
-        <a:solidFill>
-          <a:srgbClr val="FFFFFF"/>
-        </a:solidFill>
-        <a:effectLst/>
-      </p:bgPr>
-    </p:bg>
-    <p:spTree>
-      <p:nvGrpSpPr>
-        <p:cNvPr id="1" name=""/>
-        <p:cNvGrpSpPr/>
-        <p:nvPr/>
-      </p:nvGrpSpPr>
-      <p:grpSpPr>
-        <a:xfrm>
-          <a:off x="0" y="0"/>
-          <a:ext cx="0" cy="0"/>
-          <a:chOff x="0" y="0"/>
-          <a:chExt cx="0" cy="0"/>
-        </a:xfrm>
-      </p:grpSpPr>
-      <p:sp>
-        <p:nvSpPr>
-          <p:cNvPr id="2" name="Text 0"/>
-          <p:cNvSpPr/>
-          <p:nvPr/>
-        </p:nvSpPr>
-        <p:spPr>
-          <a:xfrm>
-            <a:off x="548640" y="457200"/>
-            <a:ext cx="11094415" cy="292608"/>
-          </a:xfrm>
-          <a:prstGeom prst="rect">
-            <a:avLst/>
-          </a:prstGeom>
-          <a:noFill/>
-        </p:spPr>
-        <p:txBody>
-          <a:bodyPr wrap="square" lIns="0" tIns="0" rIns="0" bIns="0" rtlCol="0" anchor="t"/>
-          <a:lstStyle/>
-          <a:p>
-            <a:pPr marL="0" indent="0">
-              <a:buNone/>
-            </a:pPr>
-            <a:r>
-              <a:rPr lang="zh-CN" altLang="en-US" sz="1600" dirty="0">
-                <a:solidFill>
-                  <a:srgbClr val="000000"/>
-                </a:solidFill>
-                <a:latin typeface="Inter" pitchFamily="34" charset="0"/>
-                <a:ea typeface="Inter" pitchFamily="34" charset="-122"/>
-                <a:cs typeface="Inter" pitchFamily="34" charset="-120"/>
-              </a:rPr>
-              <a:t>📝</a:t>
-            </a:r>
-            <a:r>
-              <a:rPr lang="en-US" sz="1600" dirty="0">
-                <a:solidFill>
-                  <a:srgbClr val="000000"/>
-                </a:solidFill>
-                <a:latin typeface="Inter" pitchFamily="34" charset="0"/>
-                <a:ea typeface="Inter" pitchFamily="34" charset="-122"/>
-                <a:cs typeface="Inter" pitchFamily="34" charset="-120"/>
-              </a:rPr>
-              <a:t>  </a:t>
-            </a:r>
-            <a:r>
-              <a:rPr lang="en-US" sz="1600" b="1" kern="0" spc="150" dirty="0">
-                <a:solidFill>
-                  <a:srgbClr val="865C1D"/>
-                </a:solidFill>
-                <a:latin typeface="Inter" pitchFamily="34" charset="0"/>
-                <a:ea typeface="Inter" pitchFamily="34" charset="-122"/>
-                <a:cs typeface="Inter" pitchFamily="34" charset="-120"/>
-              </a:rPr>
-              <a:t>SUMMARY</a:t>
-            </a:r>
-            <a:endParaRPr lang="en-US" sz="1600" dirty="0"/>
-          </a:p>
-        </p:txBody>
-      </p:sp>
-      <p:sp>
-        <p:nvSpPr>
-          <p:cNvPr id="3" name="Text 1"/>
-          <p:cNvSpPr/>
-          <p:nvPr/>
-        </p:nvSpPr>
-        <p:spPr>
-          <a:xfrm>
-            <a:off x="548640" y="768096"/>
-            <a:ext cx="11094415" cy="822960"/>
-          </a:xfrm>
-          <a:prstGeom prst="rect">
-            <a:avLst/>
-          </a:prstGeom>
-          <a:noFill/>
-        </p:spPr>
-        <p:txBody>
-          <a:bodyPr wrap="square" lIns="0" tIns="0" rIns="0" bIns="0" rtlCol="0" anchor="t"/>
-          <a:lstStyle/>
-          <a:p>
-            <a:pPr marL="0" indent="0">
-              <a:lnSpc>
-                <a:spcPct val="105000"/>
-              </a:lnSpc>
-              <a:buNone/>
-            </a:pPr>
-            <a:r>
-              <a:rPr lang="en-US" sz="3000" b="1" dirty="0">
-                <a:solidFill>
-                  <a:srgbClr val="2C2420"/>
-                </a:solidFill>
-                <a:latin typeface="Playfair Display" pitchFamily="34" charset="0"/>
-                <a:ea typeface="Playfair Display" pitchFamily="34" charset="-122"/>
-                <a:cs typeface="Playfair Display" pitchFamily="34" charset="-120"/>
-              </a:rPr>
               <a:t>[Session Title]</a:t>
             </a:r>
-            <a:endParaRPr lang="en-US" sz="3000" dirty="0"/>
+            <a:endParaRPr lang="en-US" sz="3200" dirty="0"/>
           </a:p>
         </p:txBody>
       </p:sp>
@@ -3128,7 +2764,7 @@
               <a:buChar char="•"/>
             </a:pPr>
             <a:r>
-              <a:rPr lang="en-US" sz="2000" dirty="0">
+              <a:rPr lang="en-US" sz="3000" dirty="0">
                 <a:solidFill>
                   <a:srgbClr val="2C2420"/>
                 </a:solidFill>
@@ -3138,7 +2774,7 @@
               </a:rPr>
               <a:t>[First key point participants should take away from this section]</a:t>
             </a:r>
-            <a:endParaRPr lang="en-US" sz="2000" dirty="0"/>
+            <a:endParaRPr lang="en-US" sz="3000" dirty="0"/>
           </a:p>
           <a:p>
             <a:pPr marL="342900" indent="-342900">
@@ -3152,7 +2788,7 @@
               <a:buChar char="•"/>
             </a:pPr>
             <a:r>
-              <a:rPr lang="en-US" sz="2000" dirty="0">
+              <a:rPr lang="en-US" sz="3000" dirty="0">
                 <a:solidFill>
                   <a:srgbClr val="2C2420"/>
                 </a:solidFill>
@@ -3162,7 +2798,7 @@
               </a:rPr>
               <a:t>[Second key point — keep each bullet to a single idea]</a:t>
             </a:r>
-            <a:endParaRPr lang="en-US" sz="2000" dirty="0"/>
+            <a:endParaRPr lang="en-US" sz="3000" dirty="0"/>
           </a:p>
           <a:p>
             <a:pPr marL="342900" indent="-342900">
@@ -3176,7 +2812,7 @@
               <a:buChar char="•"/>
             </a:pPr>
             <a:r>
-              <a:rPr lang="en-US" sz="2000" dirty="0">
+              <a:rPr lang="en-US" sz="3000" dirty="0">
                 <a:solidFill>
                   <a:srgbClr val="2C2420"/>
                 </a:solidFill>
@@ -3186,7 +2822,7 @@
               </a:rPr>
               <a:t>[Third key point, with a supporting detail or example]</a:t>
             </a:r>
-            <a:endParaRPr lang="en-US" sz="2000" dirty="0"/>
+            <a:endParaRPr lang="en-US" sz="3000" dirty="0"/>
           </a:p>
           <a:p>
             <a:pPr marL="342900" indent="-342900">
@@ -3200,7 +2836,7 @@
               <a:buChar char="•"/>
             </a:pPr>
             <a:r>
-              <a:rPr lang="en-US" sz="2000" dirty="0">
+              <a:rPr lang="en-US" sz="3000" dirty="0">
                 <a:solidFill>
                   <a:srgbClr val="2C2420"/>
                 </a:solidFill>
@@ -3210,7 +2846,7 @@
               </a:rPr>
               <a:t>[Fourth key point — optional, remove if not needed]</a:t>
             </a:r>
-            <a:endParaRPr lang="en-US" sz="2000" dirty="0"/>
+            <a:endParaRPr lang="en-US" sz="3000" dirty="0"/>
           </a:p>
         </p:txBody>
       </p:sp>
@@ -3260,7 +2896,7 @@
 </p:sld>
 </file>
 
-<file path=ppt/slides/slide12.xml><?xml version="1.0" encoding="utf-8"?>
+<file path=ppt/slides/slide11.xml><?xml version="1.0" encoding="utf-8"?>
 <p:sld xmlns:a="http://schemas.openxmlformats.org/drawingml/2006/main" xmlns:r="http://schemas.openxmlformats.org/officeDocument/2006/relationships" xmlns:p="http://schemas.openxmlformats.org/presentationml/2006/main">
   <p:cSld>
     <p:bg>
@@ -3427,7 +3063,7 @@
               <a:buNone/>
             </a:pPr>
             <a:r>
-              <a:rPr lang="en-US" sz="1600" dirty="0">
+              <a:rPr lang="en-US" sz="3000" dirty="0">
                 <a:solidFill>
                   <a:srgbClr val="6B6663"/>
                 </a:solidFill>
@@ -3437,7 +3073,7 @@
               </a:rPr>
               <a:t>[X] minutes — see you soon!</a:t>
             </a:r>
-            <a:endParaRPr lang="en-US" sz="1600" dirty="0"/>
+            <a:endParaRPr lang="en-US" sz="3000" dirty="0"/>
           </a:p>
         </p:txBody>
       </p:sp>
@@ -3588,7 +3224,7 @@
               <a:buNone/>
             </a:pPr>
             <a:r>
-              <a:rPr lang="en-US" sz="3000" b="1" dirty="0">
+              <a:rPr lang="en-US" sz="3600" b="1" dirty="0">
                 <a:solidFill>
                   <a:srgbClr val="2C2420"/>
                 </a:solidFill>
@@ -3598,7 +3234,7 @@
               </a:rPr>
               <a:t>What We'll Cover Today</a:t>
             </a:r>
-            <a:endParaRPr lang="en-US" sz="3000" dirty="0"/>
+            <a:endParaRPr lang="en-US" sz="3600" dirty="0"/>
           </a:p>
         </p:txBody>
       </p:sp>
@@ -3715,7 +3351,7 @@
               <a:buNone/>
             </a:pPr>
             <a:r>
-              <a:rPr lang="en-US" sz="1500" dirty="0">
+              <a:rPr lang="en-US" sz="3000" dirty="0">
                 <a:solidFill>
                   <a:srgbClr val="2C2420"/>
                 </a:solidFill>
@@ -3726,7 +3362,7 @@
               </a:rPr>
               <a:t>[Learning Goal 1]</a:t>
             </a:r>
-            <a:endParaRPr lang="en-US" sz="1500" dirty="0"/>
+            <a:endParaRPr lang="en-US" sz="3000" dirty="0"/>
           </a:p>
         </p:txBody>
       </p:sp>
@@ -3843,7 +3479,7 @@
               <a:buNone/>
             </a:pPr>
             <a:r>
-              <a:rPr lang="en-US" sz="1500" dirty="0">
+              <a:rPr lang="en-US" sz="3000" dirty="0">
                 <a:solidFill>
                   <a:srgbClr val="2C2420"/>
                 </a:solidFill>
@@ -3853,7 +3489,7 @@
               </a:rPr>
               <a:t>[Learning Goal 2]</a:t>
             </a:r>
-            <a:endParaRPr lang="en-US" sz="1500" dirty="0"/>
+            <a:endParaRPr lang="en-US" sz="3000" dirty="0"/>
           </a:p>
         </p:txBody>
       </p:sp>
@@ -3970,7 +3606,7 @@
               <a:buNone/>
             </a:pPr>
             <a:r>
-              <a:rPr lang="en-US" sz="1500" dirty="0">
+              <a:rPr lang="en-US" sz="3000" dirty="0">
                 <a:solidFill>
                   <a:srgbClr val="2C2420"/>
                 </a:solidFill>
@@ -3980,7 +3616,7 @@
               </a:rPr>
               <a:t>[Learning Goal 3]</a:t>
             </a:r>
-            <a:endParaRPr lang="en-US" sz="1500" dirty="0"/>
+            <a:endParaRPr lang="en-US" sz="3000" dirty="0"/>
           </a:p>
         </p:txBody>
       </p:sp>
@@ -4097,7 +3733,7 @@
               <a:buNone/>
             </a:pPr>
             <a:r>
-              <a:rPr lang="en-US" sz="1500" dirty="0">
+              <a:rPr lang="en-US" sz="3000" dirty="0">
                 <a:solidFill>
                   <a:srgbClr val="2C2420"/>
                 </a:solidFill>
@@ -4108,7 +3744,7 @@
               </a:rPr>
               <a:t>[Learning Goal ...]</a:t>
             </a:r>
-            <a:endParaRPr lang="en-US" sz="1500" dirty="0"/>
+            <a:endParaRPr lang="en-US" sz="3000" dirty="0"/>
           </a:p>
         </p:txBody>
       </p:sp>
@@ -4308,7 +3944,7 @@
               <a:buNone/>
             </a:pPr>
             <a:r>
-              <a:rPr lang="en-US" sz="3000" b="1" dirty="0">
+              <a:rPr lang="en-US" sz="3600" b="1" dirty="0">
                 <a:solidFill>
                   <a:srgbClr val="2C2420"/>
                 </a:solidFill>
@@ -4316,20 +3952,9 @@
                 <a:ea typeface="Playfair Display" pitchFamily="34" charset="-122"/>
                 <a:cs typeface="Playfair Display" pitchFamily="34" charset="-120"/>
               </a:rPr>
-              <a:t>Welcome </a:t>
-            </a:r>
-            <a:r>
-              <a:rPr lang="en-US" sz="3000" b="1" dirty="0">
-                <a:solidFill>
-                  <a:srgbClr val="2C2420"/>
-                </a:solidFill>
-                <a:latin typeface="Playfair Display" pitchFamily="34" charset="0"/>
-                <a:ea typeface="Playfair Display" pitchFamily="34" charset="-122"/>
-                <a:cs typeface="Playfair Display" pitchFamily="34" charset="-120"/>
-              </a:rPr>
-              <a:t>to [Session Title]</a:t>
-            </a:r>
-            <a:endParaRPr lang="en-US" sz="3000" dirty="0"/>
+              <a:t>Welcome to [Session Title]</a:t>
+            </a:r>
+            <a:endParaRPr lang="en-US" sz="3600" dirty="0"/>
           </a:p>
         </p:txBody>
       </p:sp>
@@ -4396,7 +4021,7 @@
               <a:buChar char="•"/>
             </a:pPr>
             <a:r>
-              <a:rPr lang="en-US" sz="2000" dirty="0">
+              <a:rPr lang="en-US" sz="3000" dirty="0">
                 <a:solidFill>
                   <a:srgbClr val="2C2420"/>
                 </a:solidFill>
@@ -4404,20 +4029,9 @@
                 <a:ea typeface="Inter" pitchFamily="34" charset="-122"/>
                 <a:cs typeface="Inter" pitchFamily="34" charset="-120"/>
               </a:rPr>
-              <a:t>[Welcome message</a:t>
-            </a:r>
-            <a:r>
-              <a:rPr lang="en-US" sz="2000" dirty="0">
-                <a:solidFill>
-                  <a:srgbClr val="2C2420"/>
-                </a:solidFill>
-                <a:latin typeface="Inter" pitchFamily="34" charset="0"/>
-                <a:ea typeface="Inter" pitchFamily="34" charset="-122"/>
-                <a:cs typeface="Inter" pitchFamily="34" charset="-120"/>
-              </a:rPr>
-              <a:t>s]</a:t>
-            </a:r>
-            <a:endParaRPr lang="en-US" sz="2000" dirty="0"/>
+              <a:t>[Welcome messages]</a:t>
+            </a:r>
+            <a:endParaRPr lang="en-US" sz="3000" dirty="0"/>
           </a:p>
           <a:p>
             <a:pPr indent="0">
@@ -4430,7 +4044,7 @@
               <a:buSzPct val="100000"/>
               <a:buNone/>
             </a:pPr>
-            <a:endParaRPr lang="en-US" sz="2000" dirty="0"/>
+            <a:endParaRPr lang="en-US" sz="3000" dirty="0"/>
           </a:p>
         </p:txBody>
       </p:sp>
@@ -4724,7 +4338,7 @@
               <a:buNone/>
             </a:pPr>
             <a:r>
-              <a:rPr lang="en-US" sz="2400" b="1" kern="0" spc="50" dirty="0">
+              <a:rPr lang="en-US" sz="3000" b="1" kern="0" spc="50" dirty="0">
                 <a:solidFill>
                   <a:srgbClr val="059669"/>
                 </a:solidFill>
@@ -4734,7 +4348,7 @@
               </a:rPr>
               <a:t>[THINK (2 min)]</a:t>
             </a:r>
-            <a:endParaRPr lang="en-US" sz="2400" b="1" kern="0" spc="50" dirty="0">
+            <a:endParaRPr lang="en-US" sz="3000" b="1" kern="0" spc="50" dirty="0">
               <a:solidFill>
                 <a:srgbClr val="059669"/>
               </a:solidFill>
@@ -4803,7 +4417,7 @@
               <a:buNone/>
             </a:pPr>
             <a:r>
-              <a:rPr lang="en-US" sz="2400" b="1" kern="0" spc="50" dirty="0">
+              <a:rPr lang="en-US" sz="3000" b="1" kern="0" spc="50" dirty="0">
                 <a:solidFill>
                   <a:srgbClr val="059669"/>
                 </a:solidFill>
@@ -4813,7 +4427,7 @@
               </a:rPr>
               <a:t>[PAIR (2 min)]</a:t>
             </a:r>
-            <a:endParaRPr lang="en-US" sz="2400" b="1" kern="0" spc="50" dirty="0">
+            <a:endParaRPr lang="en-US" sz="3000" b="1" kern="0" spc="50" dirty="0">
               <a:solidFill>
                 <a:srgbClr val="059669"/>
               </a:solidFill>
@@ -4880,7 +4494,7 @@
               <a:buNone/>
             </a:pPr>
             <a:r>
-              <a:rPr lang="en-US" sz="2400" b="1" kern="0" spc="50" dirty="0">
+              <a:rPr lang="en-US" sz="3000" b="1" kern="0" spc="50" dirty="0">
                 <a:solidFill>
                   <a:srgbClr val="059669"/>
                 </a:solidFill>
@@ -4890,7 +4504,7 @@
               </a:rPr>
               <a:t>[SHARE (1 min)]</a:t>
             </a:r>
-            <a:endParaRPr lang="en-US" sz="2400" dirty="0"/>
+            <a:endParaRPr lang="en-US" sz="3000" dirty="0"/>
           </a:p>
         </p:txBody>
       </p:sp>
@@ -4941,6 +4555,409 @@
 </file>
 
 <file path=ppt/slides/slide5.xml><?xml version="1.0" encoding="utf-8"?>
+<p:sld xmlns:a="http://schemas.openxmlformats.org/drawingml/2006/main" xmlns:r="http://schemas.openxmlformats.org/officeDocument/2006/relationships" xmlns:p="http://schemas.openxmlformats.org/presentationml/2006/main">
+  <p:cSld>
+    <p:spTree>
+      <p:nvGrpSpPr>
+        <p:cNvPr id="1" name=""/>
+        <p:cNvGrpSpPr/>
+        <p:nvPr/>
+      </p:nvGrpSpPr>
+      <p:grpSpPr>
+        <a:xfrm>
+          <a:off x="0" y="0"/>
+          <a:ext cx="0" cy="0"/>
+          <a:chOff x="0" y="0"/>
+          <a:chExt cx="0" cy="0"/>
+        </a:xfrm>
+      </p:grpSpPr>
+      <p:sp>
+        <p:nvSpPr>
+          <p:cNvPr id="2" name="Shape 0"/>
+          <p:cNvSpPr/>
+          <p:nvPr/>
+        </p:nvSpPr>
+        <p:spPr>
+          <a:xfrm>
+            <a:off x="0" y="0"/>
+            <a:ext cx="82296" cy="6858000"/>
+          </a:xfrm>
+          <a:prstGeom prst="rect">
+            <a:avLst/>
+          </a:prstGeom>
+          <a:solidFill>
+            <a:srgbClr val="059669"/>
+          </a:solidFill>
+        </p:spPr>
+      </p:sp>
+      <p:sp>
+        <p:nvSpPr>
+          <p:cNvPr id="3" name="Text 1"/>
+          <p:cNvSpPr/>
+          <p:nvPr/>
+        </p:nvSpPr>
+        <p:spPr>
+          <a:xfrm>
+            <a:off x="548640" y="457200"/>
+            <a:ext cx="11094415" cy="292608"/>
+          </a:xfrm>
+          <a:prstGeom prst="rect">
+            <a:avLst/>
+          </a:prstGeom>
+          <a:noFill/>
+        </p:spPr>
+        <p:txBody>
+          <a:bodyPr wrap="square" lIns="0" tIns="0" rIns="0" bIns="0" rtlCol="0" anchor="t"/>
+          <a:lstStyle/>
+          <a:p>
+            <a:pPr marL="0" indent="0">
+              <a:buNone/>
+            </a:pPr>
+            <a:r>
+              <a:rPr lang="en-US" sz="1600" b="1" kern="0" spc="150" dirty="0">
+                <a:solidFill>
+                  <a:srgbClr val="059669"/>
+                </a:solidFill>
+                <a:latin typeface="Inter" pitchFamily="34" charset="0"/>
+                <a:ea typeface="Inter" pitchFamily="34" charset="-122"/>
+                <a:cs typeface="Inter" pitchFamily="34" charset="-120"/>
+                <a:sym typeface="+mn-ea"/>
+              </a:rPr>
+              <a:t>[ACTIVITY NAME] - [PHASE/TOPIC]</a:t>
+            </a:r>
+            <a:endParaRPr lang="en-US" sz="1600" dirty="0"/>
+          </a:p>
+          <a:p>
+            <a:pPr marL="0" indent="0">
+              <a:buNone/>
+            </a:pPr>
+            <a:endParaRPr lang="en-US" sz="1600" dirty="0"/>
+          </a:p>
+        </p:txBody>
+      </p:sp>
+      <p:sp>
+        <p:nvSpPr>
+          <p:cNvPr id="5" name="Shape 3"/>
+          <p:cNvSpPr/>
+          <p:nvPr/>
+        </p:nvSpPr>
+        <p:spPr>
+          <a:xfrm>
+            <a:off x="589915" y="966470"/>
+            <a:ext cx="7249795" cy="5055870"/>
+          </a:xfrm>
+          <a:prstGeom prst="rect">
+            <a:avLst/>
+          </a:prstGeom>
+          <a:solidFill>
+            <a:srgbClr val="F8F7F6"/>
+          </a:solidFill>
+          <a:ln w="12700">
+            <a:solidFill>
+              <a:srgbClr val="DFDEDD"/>
+            </a:solidFill>
+            <a:prstDash val="solid"/>
+          </a:ln>
+          <a:effectLst>
+            <a:outerShdw blurRad="76200" dist="25400" dir="5400000" algn="bl" rotWithShape="0">
+              <a:srgbClr val="000000">
+                <a:alpha val="16000"/>
+              </a:srgbClr>
+            </a:outerShdw>
+          </a:effectLst>
+        </p:spPr>
+      </p:sp>
+      <p:sp>
+        <p:nvSpPr>
+          <p:cNvPr id="6" name="Shape 4"/>
+          <p:cNvSpPr/>
+          <p:nvPr/>
+        </p:nvSpPr>
+        <p:spPr>
+          <a:xfrm>
+            <a:off x="548640" y="966470"/>
+            <a:ext cx="76200" cy="5068570"/>
+          </a:xfrm>
+          <a:prstGeom prst="rect">
+            <a:avLst/>
+          </a:prstGeom>
+          <a:solidFill>
+            <a:srgbClr val="059669"/>
+          </a:solidFill>
+        </p:spPr>
+      </p:sp>
+      <p:sp>
+        <p:nvSpPr>
+          <p:cNvPr id="8" name="Text 6"/>
+          <p:cNvSpPr/>
+          <p:nvPr/>
+        </p:nvSpPr>
+        <p:spPr>
+          <a:xfrm>
+            <a:off x="749935" y="1219200"/>
+            <a:ext cx="6868795" cy="4540885"/>
+          </a:xfrm>
+          <a:prstGeom prst="rect">
+            <a:avLst/>
+          </a:prstGeom>
+          <a:noFill/>
+        </p:spPr>
+        <p:txBody>
+          <a:bodyPr wrap="square" lIns="0" tIns="0" rIns="0" bIns="0" rtlCol="0" anchor="t"/>
+          <a:lstStyle/>
+          <a:p>
+            <a:pPr indent="0">
+              <a:lnSpc>
+                <a:spcPct val="130000"/>
+              </a:lnSpc>
+              <a:spcAft>
+                <a:spcPts val="1400"/>
+              </a:spcAft>
+              <a:buSzPct val="100000"/>
+              <a:buNone/>
+            </a:pPr>
+            <a:r>
+              <a:rPr lang="en-US" sz="3200" dirty="0">
+                <a:solidFill>
+                  <a:srgbClr val="2C2420"/>
+                </a:solidFill>
+                <a:latin typeface="Inter" pitchFamily="34" charset="0"/>
+                <a:ea typeface="Inter" pitchFamily="34" charset="-122"/>
+                <a:cs typeface="Inter" pitchFamily="34" charset="-120"/>
+                <a:sym typeface="+mn-ea"/>
+              </a:rPr>
+              <a:t>[Write the discussion prompt or debate motion here. Keep it specific enough that groups know exactly what to argue or analyze.]</a:t>
+            </a:r>
+            <a:endParaRPr lang="en-US" sz="3200" dirty="0"/>
+          </a:p>
+        </p:txBody>
+      </p:sp>
+      <p:sp>
+        <p:nvSpPr>
+          <p:cNvPr id="9" name="Shape 7"/>
+          <p:cNvSpPr/>
+          <p:nvPr/>
+        </p:nvSpPr>
+        <p:spPr>
+          <a:xfrm>
+            <a:off x="7877810" y="966470"/>
+            <a:ext cx="3820795" cy="5043170"/>
+          </a:xfrm>
+          <a:prstGeom prst="rect">
+            <a:avLst/>
+          </a:prstGeom>
+          <a:solidFill>
+            <a:srgbClr val="F8F7F6"/>
+          </a:solidFill>
+          <a:ln w="12700">
+            <a:solidFill>
+              <a:srgbClr val="DFDEDD"/>
+            </a:solidFill>
+            <a:prstDash val="solid"/>
+          </a:ln>
+          <a:effectLst>
+            <a:outerShdw blurRad="76200" dist="25400" dir="5400000" algn="bl" rotWithShape="0">
+              <a:srgbClr val="000000">
+                <a:alpha val="16000"/>
+              </a:srgbClr>
+            </a:outerShdw>
+          </a:effectLst>
+        </p:spPr>
+      </p:sp>
+      <p:sp>
+        <p:nvSpPr>
+          <p:cNvPr id="10" name="Text 8"/>
+          <p:cNvSpPr/>
+          <p:nvPr/>
+        </p:nvSpPr>
+        <p:spPr>
+          <a:xfrm>
+            <a:off x="7932911" y="1208405"/>
+            <a:ext cx="3765389" cy="640080"/>
+          </a:xfrm>
+          <a:prstGeom prst="rect">
+            <a:avLst/>
+          </a:prstGeom>
+          <a:noFill/>
+        </p:spPr>
+        <p:txBody>
+          <a:bodyPr wrap="square" lIns="0" tIns="0" rIns="0" bIns="0" rtlCol="0" anchor="ctr"/>
+          <a:lstStyle/>
+          <a:p>
+            <a:pPr marL="0" indent="0" algn="ctr">
+              <a:buNone/>
+            </a:pPr>
+            <a:r>
+              <a:rPr lang="en-US" sz="3400" dirty="0">
+                <a:solidFill>
+                  <a:srgbClr val="000000"/>
+                </a:solidFill>
+                <a:latin typeface="Inter" pitchFamily="34" charset="0"/>
+                <a:ea typeface="Inter" pitchFamily="34" charset="-122"/>
+                <a:cs typeface="Inter" pitchFamily="34" charset="-120"/>
+              </a:rPr>
+              <a:t>🛠️</a:t>
+            </a:r>
+            <a:endParaRPr lang="en-US" sz="3400" dirty="0"/>
+          </a:p>
+        </p:txBody>
+      </p:sp>
+      <p:sp>
+        <p:nvSpPr>
+          <p:cNvPr id="11" name="Text 9"/>
+          <p:cNvSpPr/>
+          <p:nvPr/>
+        </p:nvSpPr>
+        <p:spPr>
+          <a:xfrm>
+            <a:off x="8106410" y="1724025"/>
+            <a:ext cx="3308350" cy="511175"/>
+          </a:xfrm>
+          <a:prstGeom prst="rect">
+            <a:avLst/>
+          </a:prstGeom>
+          <a:noFill/>
+        </p:spPr>
+        <p:txBody>
+          <a:bodyPr wrap="square" lIns="0" tIns="0" rIns="0" bIns="0" rtlCol="0" anchor="ctr"/>
+          <a:lstStyle/>
+          <a:p>
+            <a:pPr marL="0" indent="0" algn="ctr">
+              <a:buNone/>
+            </a:pPr>
+            <a:r>
+              <a:rPr lang="en-US" sz="3200" b="1" kern="0" spc="50" dirty="0">
+                <a:solidFill>
+                  <a:srgbClr val="059669"/>
+                </a:solidFill>
+                <a:latin typeface="Inter" pitchFamily="34" charset="0"/>
+                <a:ea typeface="Inter" pitchFamily="34" charset="-122"/>
+                <a:cs typeface="Inter" pitchFamily="34" charset="-120"/>
+              </a:rPr>
+              <a:t>Logistics</a:t>
+            </a:r>
+            <a:endParaRPr lang="en-US" sz="3200" dirty="0"/>
+          </a:p>
+        </p:txBody>
+      </p:sp>
+      <p:sp>
+        <p:nvSpPr>
+          <p:cNvPr id="12" name="Text 10"/>
+          <p:cNvSpPr/>
+          <p:nvPr/>
+        </p:nvSpPr>
+        <p:spPr>
+          <a:xfrm>
+            <a:off x="8106410" y="2384425"/>
+            <a:ext cx="3514725" cy="3143250"/>
+          </a:xfrm>
+          <a:prstGeom prst="rect">
+            <a:avLst/>
+          </a:prstGeom>
+          <a:noFill/>
+        </p:spPr>
+        <p:txBody>
+          <a:bodyPr wrap="square" lIns="0" tIns="0" rIns="0" bIns="0" rtlCol="0" anchor="t"/>
+          <a:lstStyle/>
+          <a:p>
+            <a:pPr indent="0">
+              <a:lnSpc>
+                <a:spcPct val="125000"/>
+              </a:lnSpc>
+              <a:spcAft>
+                <a:spcPts val="800"/>
+              </a:spcAft>
+              <a:buSzPct val="100000"/>
+              <a:buNone/>
+            </a:pPr>
+            <a:r>
+              <a:rPr lang="en-US" sz="2400" dirty="0">
+                <a:solidFill>
+                  <a:srgbClr val="2C2420"/>
+                </a:solidFill>
+                <a:latin typeface="Inter" pitchFamily="34" charset="0"/>
+                <a:ea typeface="Inter" pitchFamily="34" charset="-122"/>
+                <a:cs typeface="Inter" pitchFamily="34" charset="-120"/>
+                <a:sym typeface="+mn-ea"/>
+              </a:rPr>
+              <a:t>[Form groups of 4]</a:t>
+            </a:r>
+            <a:endParaRPr lang="en-US" sz="2400" dirty="0"/>
+          </a:p>
+          <a:p>
+            <a:pPr indent="0">
+              <a:lnSpc>
+                <a:spcPct val="125000"/>
+              </a:lnSpc>
+              <a:spcAft>
+                <a:spcPts val="800"/>
+              </a:spcAft>
+              <a:buSzPct val="100000"/>
+              <a:buNone/>
+            </a:pPr>
+            <a:r>
+              <a:rPr lang="en-US" sz="2400" dirty="0">
+                <a:solidFill>
+                  <a:srgbClr val="2C2420"/>
+                </a:solidFill>
+                <a:latin typeface="Inter" pitchFamily="34" charset="0"/>
+                <a:ea typeface="Inter" pitchFamily="34" charset="-122"/>
+                <a:cs typeface="Inter" pitchFamily="34" charset="-120"/>
+                <a:sym typeface="+mn-ea"/>
+              </a:rPr>
+              <a:t>[X minutes to discuss]</a:t>
+            </a:r>
+            <a:endParaRPr lang="en-US" sz="2400" dirty="0"/>
+          </a:p>
+        </p:txBody>
+      </p:sp>
+      <p:sp>
+        <p:nvSpPr>
+          <p:cNvPr id="13" name="Text 11"/>
+          <p:cNvSpPr/>
+          <p:nvPr/>
+        </p:nvSpPr>
+        <p:spPr>
+          <a:xfrm>
+            <a:off x="8899855" y="6473952"/>
+            <a:ext cx="3108960" cy="274320"/>
+          </a:xfrm>
+          <a:prstGeom prst="rect">
+            <a:avLst/>
+          </a:prstGeom>
+          <a:noFill/>
+        </p:spPr>
+        <p:txBody>
+          <a:bodyPr wrap="square" lIns="0" tIns="0" rIns="0" bIns="0" rtlCol="0" anchor="ctr"/>
+          <a:lstStyle/>
+          <a:p>
+            <a:pPr marL="0" indent="0" algn="r">
+              <a:buNone/>
+            </a:pPr>
+            <a:r>
+              <a:rPr lang="en-US" sz="850" kern="0" spc="50" dirty="0">
+                <a:solidFill>
+                  <a:srgbClr val="6B6663"/>
+                </a:solidFill>
+                <a:latin typeface="Inter" pitchFamily="34" charset="0"/>
+                <a:ea typeface="Inter" pitchFamily="34" charset="-122"/>
+                <a:cs typeface="Inter" pitchFamily="34" charset="-120"/>
+              </a:rPr>
+              <a:t>TEMPLATE  ·  activity_sidebar</a:t>
+            </a:r>
+            <a:endParaRPr lang="en-US" sz="850" dirty="0"/>
+          </a:p>
+        </p:txBody>
+      </p:sp>
+    </p:spTree>
+  </p:cSld>
+  <p:clrMapOvr>
+    <a:masterClrMapping/>
+  </p:clrMapOvr>
+</p:sld>
+</file>
+
+<file path=ppt/slides/slide6.xml><?xml version="1.0" encoding="utf-8"?>
 <p:sld xmlns:a="http://schemas.openxmlformats.org/drawingml/2006/main" xmlns:r="http://schemas.openxmlformats.org/officeDocument/2006/relationships" xmlns:p="http://schemas.openxmlformats.org/presentationml/2006/main">
   <p:cSld>
     <p:bg>
@@ -4980,7 +4997,7 @@
             <a:avLst/>
           </a:prstGeom>
           <a:solidFill>
-            <a:srgbClr val="059669"/>
+            <a:srgbClr val="2563EB"/>
           </a:solidFill>
         </p:spPr>
       </p:sp>
@@ -5010,28 +5027,35 @@
             <a:r>
               <a:rPr lang="en-US" sz="1600" b="1" kern="0" spc="150" dirty="0">
                 <a:solidFill>
-                  <a:srgbClr val="059669"/>
-                </a:solidFill>
-                <a:latin typeface="Inter" pitchFamily="34" charset="0"/>
-                <a:ea typeface="Inter" pitchFamily="34" charset="-122"/>
-                <a:cs typeface="Inter" pitchFamily="34" charset="-120"/>
+                  <a:srgbClr val="2563EB"/>
+                </a:solidFill>
+                <a:latin typeface="Inter" pitchFamily="34" charset="0"/>
+                <a:ea typeface="Inter" pitchFamily="34" charset="-122"/>
+                <a:cs typeface="Inter" pitchFamily="34" charset="-120"/>
+                <a:sym typeface="+mn-ea"/>
               </a:rPr>
               <a:t>[ACTIVITY NAME] - [PHASE/TOPIC]</a:t>
             </a:r>
             <a:endParaRPr lang="en-US" sz="1600" dirty="0"/>
           </a:p>
-        </p:txBody>
-      </p:sp>
-      <p:sp>
-        <p:nvSpPr>
-          <p:cNvPr id="5" name="Shape 3"/>
-          <p:cNvSpPr/>
-          <p:nvPr/>
-        </p:nvSpPr>
-        <p:spPr>
-          <a:xfrm>
-            <a:off x="529590" y="838200"/>
-            <a:ext cx="11202670" cy="3219450"/>
+          <a:p>
+            <a:pPr marL="0" indent="0">
+              <a:buNone/>
+            </a:pPr>
+            <a:endParaRPr lang="en-US" sz="1600" dirty="0"/>
+          </a:p>
+        </p:txBody>
+      </p:sp>
+      <p:sp>
+        <p:nvSpPr>
+          <p:cNvPr id="9" name="Shape 7"/>
+          <p:cNvSpPr/>
+          <p:nvPr/>
+        </p:nvSpPr>
+        <p:spPr>
+          <a:xfrm>
+            <a:off x="548640" y="996950"/>
+            <a:ext cx="11094720" cy="5045075"/>
           </a:xfrm>
           <a:prstGeom prst="rect">
             <a:avLst/>
@@ -5056,688 +5080,13 @@
       </p:sp>
       <p:sp>
         <p:nvSpPr>
-          <p:cNvPr id="6" name="Shape 4"/>
-          <p:cNvSpPr/>
-          <p:nvPr/>
-        </p:nvSpPr>
-        <p:spPr>
-          <a:xfrm flipH="1">
-            <a:off x="487045" y="838200"/>
-            <a:ext cx="76200" cy="3211830"/>
-          </a:xfrm>
-          <a:prstGeom prst="rect">
-            <a:avLst/>
-          </a:prstGeom>
-          <a:solidFill>
-            <a:srgbClr val="059669"/>
-          </a:solidFill>
-        </p:spPr>
-      </p:sp>
-      <p:sp>
-        <p:nvSpPr>
-          <p:cNvPr id="7" name="Text 5"/>
-          <p:cNvSpPr/>
-          <p:nvPr/>
-        </p:nvSpPr>
-        <p:spPr>
-          <a:xfrm>
-            <a:off x="868680" y="1019302"/>
-            <a:ext cx="10454335" cy="905256"/>
-          </a:xfrm>
-          <a:prstGeom prst="rect">
-            <a:avLst/>
-          </a:prstGeom>
-          <a:noFill/>
-        </p:spPr>
-        <p:txBody>
-          <a:bodyPr wrap="square" lIns="0" tIns="0" rIns="0" bIns="0" rtlCol="0" anchor="t"/>
-          <a:lstStyle/>
-          <a:p>
-            <a:pPr marL="0" indent="0">
-              <a:lnSpc>
-                <a:spcPct val="130000"/>
-              </a:lnSpc>
-              <a:buNone/>
-            </a:pPr>
-            <a:r>
-              <a:rPr lang="en-US" sz="3200" dirty="0">
-                <a:solidFill>
-                  <a:srgbClr val="2C2420"/>
-                </a:solidFill>
-                <a:latin typeface="Inter" pitchFamily="34" charset="0"/>
-                <a:ea typeface="Inter" pitchFamily="34" charset="-122"/>
-                <a:cs typeface="Inter" pitchFamily="34" charset="-120"/>
-              </a:rPr>
-              <a:t>[Write the discussion prompt or debate motion here. Keep it specific enough that groups know exactly what to argue or analyze.]</a:t>
-            </a:r>
-            <a:endParaRPr lang="en-US" sz="3200" dirty="0"/>
-          </a:p>
-        </p:txBody>
-      </p:sp>
-      <p:sp>
-        <p:nvSpPr>
-          <p:cNvPr id="8" name="Shape 6"/>
-          <p:cNvSpPr/>
-          <p:nvPr/>
-        </p:nvSpPr>
-        <p:spPr>
-          <a:xfrm>
-            <a:off x="548640" y="4243070"/>
-            <a:ext cx="5433060" cy="1883410"/>
-          </a:xfrm>
-          <a:prstGeom prst="rect">
-            <a:avLst/>
-          </a:prstGeom>
-          <a:solidFill>
-            <a:srgbClr val="F8F7F6"/>
-          </a:solidFill>
-          <a:ln w="12700">
-            <a:solidFill>
-              <a:srgbClr val="DFDEDD"/>
-            </a:solidFill>
-            <a:prstDash val="solid"/>
-          </a:ln>
-          <a:effectLst>
-            <a:outerShdw blurRad="76200" dist="25400" dir="5400000" algn="bl" rotWithShape="0">
-              <a:srgbClr val="000000">
-                <a:alpha val="16000"/>
-              </a:srgbClr>
-            </a:outerShdw>
-          </a:effectLst>
-        </p:spPr>
-      </p:sp>
-      <p:sp>
-        <p:nvSpPr>
-          <p:cNvPr id="9" name="Text 7"/>
-          <p:cNvSpPr/>
-          <p:nvPr/>
-        </p:nvSpPr>
-        <p:spPr>
-          <a:xfrm>
-            <a:off x="731393" y="4343146"/>
-            <a:ext cx="5030572" cy="274320"/>
-          </a:xfrm>
-          <a:prstGeom prst="rect">
-            <a:avLst/>
-          </a:prstGeom>
-          <a:noFill/>
-        </p:spPr>
-        <p:txBody>
-          <a:bodyPr wrap="square" lIns="0" tIns="0" rIns="0" bIns="0" rtlCol="0" anchor="t"/>
-          <a:lstStyle/>
-          <a:p>
-            <a:pPr marL="0" indent="0">
-              <a:buNone/>
-            </a:pPr>
-            <a:r>
-              <a:rPr lang="en-US" sz="2400" b="1" kern="0" spc="50" dirty="0">
-                <a:solidFill>
-                  <a:srgbClr val="059669"/>
-                </a:solidFill>
-                <a:latin typeface="Inter" pitchFamily="34" charset="0"/>
-                <a:ea typeface="Inter" pitchFamily="34" charset="-122"/>
-                <a:cs typeface="Inter" pitchFamily="34" charset="-120"/>
-              </a:rPr>
-              <a:t>LOGISTICS</a:t>
-            </a:r>
-            <a:endParaRPr lang="en-US" sz="2400" dirty="0"/>
-          </a:p>
-        </p:txBody>
-      </p:sp>
-      <p:sp>
-        <p:nvSpPr>
           <p:cNvPr id="10" name="Text 8"/>
           <p:cNvSpPr/>
           <p:nvPr/>
         </p:nvSpPr>
         <p:spPr>
           <a:xfrm>
-            <a:off x="749935" y="4869180"/>
-            <a:ext cx="5030470" cy="1074420"/>
-          </a:xfrm>
-          <a:prstGeom prst="rect">
-            <a:avLst/>
-          </a:prstGeom>
-          <a:noFill/>
-        </p:spPr>
-        <p:txBody>
-          <a:bodyPr wrap="square" lIns="0" tIns="0" rIns="0" bIns="0" rtlCol="0" anchor="t"/>
-          <a:lstStyle/>
-          <a:p>
-            <a:pPr marL="342900" indent="-342900">
-              <a:lnSpc>
-                <a:spcPct val="125000"/>
-              </a:lnSpc>
-              <a:spcAft>
-                <a:spcPts val="800"/>
-              </a:spcAft>
-              <a:buSzPct val="100000"/>
-              <a:buChar char="•"/>
-            </a:pPr>
-            <a:r>
-              <a:rPr lang="en-US" sz="1400" dirty="0">
-                <a:solidFill>
-                  <a:srgbClr val="2C2420"/>
-                </a:solidFill>
-                <a:latin typeface="Inter" pitchFamily="34" charset="0"/>
-                <a:ea typeface="Inter" pitchFamily="34" charset="-122"/>
-                <a:cs typeface="Inter" pitchFamily="34" charset="-120"/>
-              </a:rPr>
-              <a:t>[Form groups of 4]</a:t>
-            </a:r>
-            <a:endParaRPr lang="en-US" sz="1400" dirty="0"/>
-          </a:p>
-          <a:p>
-            <a:pPr marL="342900" indent="-342900">
-              <a:lnSpc>
-                <a:spcPct val="125000"/>
-              </a:lnSpc>
-              <a:spcAft>
-                <a:spcPts val="800"/>
-              </a:spcAft>
-              <a:buSzPct val="100000"/>
-              <a:buChar char="•"/>
-            </a:pPr>
-            <a:r>
-              <a:rPr lang="en-US" sz="1400" dirty="0">
-                <a:solidFill>
-                  <a:srgbClr val="2C2420"/>
-                </a:solidFill>
-                <a:latin typeface="Inter" pitchFamily="34" charset="0"/>
-                <a:ea typeface="Inter" pitchFamily="34" charset="-122"/>
-                <a:cs typeface="Inter" pitchFamily="34" charset="-120"/>
-              </a:rPr>
-              <a:t>[Assign a note-taker and a speaker]</a:t>
-            </a:r>
-            <a:endParaRPr lang="en-US" sz="1400" dirty="0"/>
-          </a:p>
-          <a:p>
-            <a:pPr marL="342900" indent="-342900">
-              <a:lnSpc>
-                <a:spcPct val="125000"/>
-              </a:lnSpc>
-              <a:spcAft>
-                <a:spcPts val="800"/>
-              </a:spcAft>
-              <a:buSzPct val="100000"/>
-              <a:buChar char="•"/>
-            </a:pPr>
-            <a:r>
-              <a:rPr lang="en-US" sz="1400" dirty="0">
-                <a:solidFill>
-                  <a:srgbClr val="2C2420"/>
-                </a:solidFill>
-                <a:latin typeface="Inter" pitchFamily="34" charset="0"/>
-                <a:ea typeface="Inter" pitchFamily="34" charset="-122"/>
-                <a:cs typeface="Inter" pitchFamily="34" charset="-120"/>
-              </a:rPr>
-              <a:t>[You have X minutes to discuss]</a:t>
-            </a:r>
-            <a:endParaRPr lang="en-US" sz="1400" dirty="0"/>
-          </a:p>
-        </p:txBody>
-      </p:sp>
-      <p:sp>
-        <p:nvSpPr>
-          <p:cNvPr id="11" name="Shape 9"/>
-          <p:cNvSpPr/>
-          <p:nvPr/>
-        </p:nvSpPr>
-        <p:spPr>
-          <a:xfrm>
-            <a:off x="6210300" y="4243070"/>
-            <a:ext cx="5433060" cy="1883410"/>
-          </a:xfrm>
-          <a:prstGeom prst="rect">
-            <a:avLst/>
-          </a:prstGeom>
-          <a:solidFill>
-            <a:srgbClr val="F8F7F6"/>
-          </a:solidFill>
-          <a:ln w="12700">
-            <a:solidFill>
-              <a:srgbClr val="DFDEDD"/>
-            </a:solidFill>
-            <a:prstDash val="solid"/>
-          </a:ln>
-          <a:effectLst>
-            <a:outerShdw blurRad="76200" dist="25400" dir="5400000" algn="bl" rotWithShape="0">
-              <a:srgbClr val="000000">
-                <a:alpha val="16000"/>
-              </a:srgbClr>
-            </a:outerShdw>
-          </a:effectLst>
-        </p:spPr>
-      </p:sp>
-      <p:sp>
-        <p:nvSpPr>
-          <p:cNvPr id="12" name="Text 10"/>
-          <p:cNvSpPr/>
-          <p:nvPr/>
-        </p:nvSpPr>
-        <p:spPr>
-          <a:xfrm>
-            <a:off x="6410681" y="4343146"/>
-            <a:ext cx="5030572" cy="274320"/>
-          </a:xfrm>
-          <a:prstGeom prst="rect">
-            <a:avLst/>
-          </a:prstGeom>
-          <a:noFill/>
-        </p:spPr>
-        <p:txBody>
-          <a:bodyPr wrap="square" lIns="0" tIns="0" rIns="0" bIns="0" rtlCol="0" anchor="t"/>
-          <a:lstStyle/>
-          <a:p>
-            <a:pPr marL="0" indent="0">
-              <a:buNone/>
-            </a:pPr>
-            <a:r>
-              <a:rPr lang="en-US" sz="2400" b="1" kern="0" spc="50" dirty="0">
-                <a:solidFill>
-                  <a:srgbClr val="059669"/>
-                </a:solidFill>
-                <a:latin typeface="Inter" pitchFamily="34" charset="0"/>
-                <a:ea typeface="Inter" pitchFamily="34" charset="-122"/>
-                <a:cs typeface="Inter" pitchFamily="34" charset="-120"/>
-              </a:rPr>
-              <a:t>DELIVERABLE</a:t>
-            </a:r>
-            <a:endParaRPr lang="en-US" sz="2400" dirty="0"/>
-          </a:p>
-        </p:txBody>
-      </p:sp>
-      <p:sp>
-        <p:nvSpPr>
-          <p:cNvPr id="13" name="Text 11"/>
-          <p:cNvSpPr/>
-          <p:nvPr/>
-        </p:nvSpPr>
-        <p:spPr>
-          <a:xfrm>
-            <a:off x="6410960" y="4850765"/>
-            <a:ext cx="5030470" cy="1092835"/>
-          </a:xfrm>
-          <a:prstGeom prst="rect">
-            <a:avLst/>
-          </a:prstGeom>
-          <a:noFill/>
-        </p:spPr>
-        <p:txBody>
-          <a:bodyPr wrap="square" lIns="0" tIns="0" rIns="0" bIns="0" rtlCol="0" anchor="t"/>
-          <a:lstStyle/>
-          <a:p>
-            <a:pPr marL="0" indent="0">
-              <a:lnSpc>
-                <a:spcPct val="130000"/>
-              </a:lnSpc>
-              <a:buNone/>
-            </a:pPr>
-            <a:r>
-              <a:rPr lang="en-US" sz="1400" dirty="0">
-                <a:solidFill>
-                  <a:srgbClr val="2C2420"/>
-                </a:solidFill>
-                <a:latin typeface="Inter" pitchFamily="34" charset="0"/>
-                <a:ea typeface="Inter" pitchFamily="34" charset="-122"/>
-                <a:cs typeface="Inter" pitchFamily="34" charset="-120"/>
-              </a:rPr>
-              <a:t>[Describe what the group should be ready to share — e.g. two examples and their reasoning.]</a:t>
-            </a:r>
-            <a:endParaRPr lang="en-US" sz="1400" dirty="0"/>
-          </a:p>
-        </p:txBody>
-      </p:sp>
-      <p:sp>
-        <p:nvSpPr>
-          <p:cNvPr id="14" name="Text 12"/>
-          <p:cNvSpPr/>
-          <p:nvPr/>
-        </p:nvSpPr>
-        <p:spPr>
-          <a:xfrm>
-            <a:off x="8899855" y="6473952"/>
-            <a:ext cx="3108960" cy="274320"/>
-          </a:xfrm>
-          <a:prstGeom prst="rect">
-            <a:avLst/>
-          </a:prstGeom>
-          <a:noFill/>
-        </p:spPr>
-        <p:txBody>
-          <a:bodyPr wrap="square" lIns="0" tIns="0" rIns="0" bIns="0" rtlCol="0" anchor="ctr"/>
-          <a:lstStyle/>
-          <a:p>
-            <a:pPr marL="0" indent="0" algn="r">
-              <a:buNone/>
-            </a:pPr>
-            <a:r>
-              <a:rPr lang="en-US" sz="850" kern="0" spc="50" dirty="0">
-                <a:solidFill>
-                  <a:srgbClr val="6B6663"/>
-                </a:solidFill>
-                <a:latin typeface="Inter" pitchFamily="34" charset="0"/>
-                <a:ea typeface="Inter" pitchFamily="34" charset="-122"/>
-                <a:cs typeface="Inter" pitchFamily="34" charset="-120"/>
-              </a:rPr>
-              <a:t>TEMPLATE  ·  activity_tiled</a:t>
-            </a:r>
-            <a:endParaRPr lang="en-US" sz="850" dirty="0"/>
-          </a:p>
-        </p:txBody>
-      </p:sp>
-    </p:spTree>
-  </p:cSld>
-  <p:clrMapOvr>
-    <a:masterClrMapping/>
-  </p:clrMapOvr>
-</p:sld>
-</file>
-
-<file path=ppt/slides/slide6.xml><?xml version="1.0" encoding="utf-8"?>
-<p:sld xmlns:a="http://schemas.openxmlformats.org/drawingml/2006/main" xmlns:r="http://schemas.openxmlformats.org/officeDocument/2006/relationships" xmlns:p="http://schemas.openxmlformats.org/presentationml/2006/main">
-  <p:cSld>
-    <p:spTree>
-      <p:nvGrpSpPr>
-        <p:cNvPr id="1" name=""/>
-        <p:cNvGrpSpPr/>
-        <p:nvPr/>
-      </p:nvGrpSpPr>
-      <p:grpSpPr>
-        <a:xfrm>
-          <a:off x="0" y="0"/>
-          <a:ext cx="0" cy="0"/>
-          <a:chOff x="0" y="0"/>
-          <a:chExt cx="0" cy="0"/>
-        </a:xfrm>
-      </p:grpSpPr>
-      <p:sp>
-        <p:nvSpPr>
-          <p:cNvPr id="2" name="Shape 0"/>
-          <p:cNvSpPr/>
-          <p:nvPr/>
-        </p:nvSpPr>
-        <p:spPr>
-          <a:xfrm>
-            <a:off x="0" y="0"/>
-            <a:ext cx="82296" cy="6858000"/>
-          </a:xfrm>
-          <a:prstGeom prst="rect">
-            <a:avLst/>
-          </a:prstGeom>
-          <a:solidFill>
-            <a:srgbClr val="059669"/>
-          </a:solidFill>
-        </p:spPr>
-      </p:sp>
-      <p:sp>
-        <p:nvSpPr>
-          <p:cNvPr id="3" name="Text 1"/>
-          <p:cNvSpPr/>
-          <p:nvPr/>
-        </p:nvSpPr>
-        <p:spPr>
-          <a:xfrm>
-            <a:off x="548640" y="457200"/>
-            <a:ext cx="11094415" cy="292608"/>
-          </a:xfrm>
-          <a:prstGeom prst="rect">
-            <a:avLst/>
-          </a:prstGeom>
-          <a:noFill/>
-        </p:spPr>
-        <p:txBody>
-          <a:bodyPr wrap="square" lIns="0" tIns="0" rIns="0" bIns="0" rtlCol="0" anchor="t"/>
-          <a:lstStyle/>
-          <a:p>
-            <a:pPr marL="0" indent="0">
-              <a:buNone/>
-            </a:pPr>
-            <a:r>
-              <a:rPr lang="en-US" sz="1600" b="1" kern="0" spc="150" dirty="0">
-                <a:solidFill>
-                  <a:srgbClr val="059669"/>
-                </a:solidFill>
-                <a:latin typeface="Inter" pitchFamily="34" charset="0"/>
-                <a:ea typeface="Inter" pitchFamily="34" charset="-122"/>
-                <a:cs typeface="Inter" pitchFamily="34" charset="-120"/>
-                <a:sym typeface="+mn-ea"/>
-              </a:rPr>
-              <a:t>[ACTIVITY NAME] - [PHASE/TOPIC]</a:t>
-            </a:r>
-            <a:endParaRPr lang="en-US" sz="1600" dirty="0"/>
-          </a:p>
-          <a:p>
-            <a:pPr marL="0" indent="0">
-              <a:buNone/>
-            </a:pPr>
-            <a:endParaRPr lang="en-US" sz="1600" dirty="0"/>
-          </a:p>
-        </p:txBody>
-      </p:sp>
-      <p:sp>
-        <p:nvSpPr>
-          <p:cNvPr id="5" name="Shape 3"/>
-          <p:cNvSpPr/>
-          <p:nvPr/>
-        </p:nvSpPr>
-        <p:spPr>
-          <a:xfrm>
-            <a:off x="589915" y="966470"/>
-            <a:ext cx="7249795" cy="5055870"/>
-          </a:xfrm>
-          <a:prstGeom prst="rect">
-            <a:avLst/>
-          </a:prstGeom>
-          <a:solidFill>
-            <a:srgbClr val="F8F7F6"/>
-          </a:solidFill>
-          <a:ln w="12700">
-            <a:solidFill>
-              <a:srgbClr val="DFDEDD"/>
-            </a:solidFill>
-            <a:prstDash val="solid"/>
-          </a:ln>
-          <a:effectLst>
-            <a:outerShdw blurRad="76200" dist="25400" dir="5400000" algn="bl" rotWithShape="0">
-              <a:srgbClr val="000000">
-                <a:alpha val="16000"/>
-              </a:srgbClr>
-            </a:outerShdw>
-          </a:effectLst>
-        </p:spPr>
-      </p:sp>
-      <p:sp>
-        <p:nvSpPr>
-          <p:cNvPr id="6" name="Shape 4"/>
-          <p:cNvSpPr/>
-          <p:nvPr/>
-        </p:nvSpPr>
-        <p:spPr>
-          <a:xfrm>
-            <a:off x="548640" y="966470"/>
-            <a:ext cx="76200" cy="5068570"/>
-          </a:xfrm>
-          <a:prstGeom prst="rect">
-            <a:avLst/>
-          </a:prstGeom>
-          <a:solidFill>
-            <a:srgbClr val="059669"/>
-          </a:solidFill>
-        </p:spPr>
-      </p:sp>
-      <p:sp>
-        <p:nvSpPr>
-          <p:cNvPr id="7" name="Text 5"/>
-          <p:cNvSpPr/>
-          <p:nvPr/>
-        </p:nvSpPr>
-        <p:spPr>
-          <a:xfrm>
-            <a:off x="749808" y="1163701"/>
-            <a:ext cx="6698090" cy="274320"/>
-          </a:xfrm>
-          <a:prstGeom prst="rect">
-            <a:avLst/>
-          </a:prstGeom>
-          <a:noFill/>
-        </p:spPr>
-        <p:txBody>
-          <a:bodyPr wrap="square" lIns="0" tIns="0" rIns="0" bIns="0" rtlCol="0" anchor="t"/>
-          <a:lstStyle/>
-          <a:p>
-            <a:pPr marL="0" indent="0">
-              <a:buNone/>
-            </a:pPr>
-            <a:r>
-              <a:rPr lang="en-US" sz="1600" b="1" kern="0" spc="50" dirty="0">
-                <a:solidFill>
-                  <a:srgbClr val="059669"/>
-                </a:solidFill>
-                <a:latin typeface="Inter" pitchFamily="34" charset="0"/>
-                <a:ea typeface="Inter" pitchFamily="34" charset="-122"/>
-                <a:cs typeface="Inter" pitchFamily="34" charset="-120"/>
-              </a:rPr>
-              <a:t>INSTRUCTIONS</a:t>
-            </a:r>
-            <a:endParaRPr lang="en-US" sz="1600" dirty="0"/>
-          </a:p>
-        </p:txBody>
-      </p:sp>
-      <p:sp>
-        <p:nvSpPr>
-          <p:cNvPr id="8" name="Text 6"/>
-          <p:cNvSpPr/>
-          <p:nvPr/>
-        </p:nvSpPr>
-        <p:spPr>
-          <a:xfrm>
-            <a:off x="749808" y="1577340"/>
-            <a:ext cx="6698090" cy="3703320"/>
-          </a:xfrm>
-          <a:prstGeom prst="rect">
-            <a:avLst/>
-          </a:prstGeom>
-          <a:noFill/>
-        </p:spPr>
-        <p:txBody>
-          <a:bodyPr wrap="square" lIns="0" tIns="0" rIns="0" bIns="0" rtlCol="0" anchor="t"/>
-          <a:lstStyle/>
-          <a:p>
-            <a:pPr marL="342900" indent="-342900">
-              <a:lnSpc>
-                <a:spcPct val="130000"/>
-              </a:lnSpc>
-              <a:spcAft>
-                <a:spcPts val="1400"/>
-              </a:spcAft>
-              <a:buSzPct val="100000"/>
-              <a:buChar char="•"/>
-            </a:pPr>
-            <a:r>
-              <a:rPr lang="en-US" dirty="0">
-                <a:solidFill>
-                  <a:srgbClr val="2C2420"/>
-                </a:solidFill>
-                <a:latin typeface="Inter" pitchFamily="34" charset="0"/>
-                <a:ea typeface="Inter" pitchFamily="34" charset="-122"/>
-                <a:cs typeface="Inter" pitchFamily="34" charset="-120"/>
-              </a:rPr>
-              <a:t>[Step 1 — set up your environment / materials]</a:t>
-            </a:r>
-            <a:endParaRPr lang="en-US" dirty="0"/>
-          </a:p>
-          <a:p>
-            <a:pPr marL="342900" indent="-342900">
-              <a:lnSpc>
-                <a:spcPct val="130000"/>
-              </a:lnSpc>
-              <a:spcAft>
-                <a:spcPts val="1400"/>
-              </a:spcAft>
-              <a:buSzPct val="100000"/>
-              <a:buChar char="•"/>
-            </a:pPr>
-            <a:r>
-              <a:rPr lang="en-US" dirty="0">
-                <a:solidFill>
-                  <a:srgbClr val="2C2420"/>
-                </a:solidFill>
-                <a:latin typeface="Inter" pitchFamily="34" charset="0"/>
-                <a:ea typeface="Inter" pitchFamily="34" charset="-122"/>
-                <a:cs typeface="Inter" pitchFamily="34" charset="-120"/>
-              </a:rPr>
-              <a:t>[Step 2 — complete the core task]</a:t>
-            </a:r>
-            <a:endParaRPr lang="en-US" dirty="0"/>
-          </a:p>
-          <a:p>
-            <a:pPr marL="342900" indent="-342900">
-              <a:lnSpc>
-                <a:spcPct val="130000"/>
-              </a:lnSpc>
-              <a:spcAft>
-                <a:spcPts val="1400"/>
-              </a:spcAft>
-              <a:buSzPct val="100000"/>
-              <a:buChar char="•"/>
-            </a:pPr>
-            <a:r>
-              <a:rPr lang="en-US" dirty="0">
-                <a:solidFill>
-                  <a:srgbClr val="2C2420"/>
-                </a:solidFill>
-                <a:latin typeface="Inter" pitchFamily="34" charset="0"/>
-                <a:ea typeface="Inter" pitchFamily="34" charset="-122"/>
-                <a:cs typeface="Inter" pitchFamily="34" charset="-120"/>
-              </a:rPr>
-              <a:t>[Step 3 — check your result against the expected outcome]</a:t>
-            </a:r>
-            <a:endParaRPr lang="en-US" dirty="0"/>
-          </a:p>
-        </p:txBody>
-      </p:sp>
-      <p:sp>
-        <p:nvSpPr>
-          <p:cNvPr id="9" name="Shape 7"/>
-          <p:cNvSpPr/>
-          <p:nvPr/>
-        </p:nvSpPr>
-        <p:spPr>
-          <a:xfrm>
-            <a:off x="7877810" y="966470"/>
-            <a:ext cx="3820795" cy="5043170"/>
-          </a:xfrm>
-          <a:prstGeom prst="rect">
-            <a:avLst/>
-          </a:prstGeom>
-          <a:solidFill>
-            <a:srgbClr val="F8F7F6"/>
-          </a:solidFill>
-          <a:ln w="12700">
-            <a:solidFill>
-              <a:srgbClr val="DFDEDD"/>
-            </a:solidFill>
-            <a:prstDash val="solid"/>
-          </a:ln>
-          <a:effectLst>
-            <a:outerShdw blurRad="76200" dist="25400" dir="5400000" algn="bl" rotWithShape="0">
-              <a:srgbClr val="000000">
-                <a:alpha val="16000"/>
-              </a:srgbClr>
-            </a:outerShdw>
-          </a:effectLst>
-        </p:spPr>
-      </p:sp>
-      <p:sp>
-        <p:nvSpPr>
-          <p:cNvPr id="10" name="Text 8"/>
-          <p:cNvSpPr/>
-          <p:nvPr/>
-        </p:nvSpPr>
-        <p:spPr>
-          <a:xfrm>
-            <a:off x="7877666" y="2057400"/>
+            <a:off x="4213081" y="2057400"/>
             <a:ext cx="3765389" cy="640080"/>
           </a:xfrm>
           <a:prstGeom prst="rect">
@@ -5761,7 +5110,7 @@
                 <a:ea typeface="Inter" pitchFamily="34" charset="-122"/>
                 <a:cs typeface="Inter" pitchFamily="34" charset="-120"/>
               </a:rPr>
-              <a:t>🛠️</a:t>
+              <a:t>🙋</a:t>
             </a:r>
             <a:endParaRPr lang="en-US" sz="3400" dirty="0"/>
           </a:p>
@@ -5775,7 +5124,7 @@
         </p:nvSpPr>
         <p:spPr>
           <a:xfrm>
-            <a:off x="8060546" y="2788920"/>
+            <a:off x="4395961" y="2697480"/>
             <a:ext cx="3399629" cy="365760"/>
           </a:xfrm>
           <a:prstGeom prst="rect">
@@ -5791,17 +5140,17 @@
               <a:buNone/>
             </a:pPr>
             <a:r>
-              <a:rPr lang="en-US" sz="1600" b="1" kern="0" spc="50" dirty="0">
-                <a:solidFill>
-                  <a:srgbClr val="059669"/>
-                </a:solidFill>
-                <a:latin typeface="Inter" pitchFamily="34" charset="0"/>
-                <a:ea typeface="Inter" pitchFamily="34" charset="-122"/>
-                <a:cs typeface="Inter" pitchFamily="34" charset="-120"/>
-              </a:rPr>
-              <a:t>[Time &amp; Materials]</a:t>
-            </a:r>
-            <a:endParaRPr lang="en-US" sz="1600" dirty="0"/>
+              <a:rPr lang="en-US" sz="3200" b="1" kern="0" spc="50" dirty="0">
+                <a:solidFill>
+                  <a:srgbClr val="2563EB"/>
+                </a:solidFill>
+                <a:latin typeface="Inter" pitchFamily="34" charset="0"/>
+                <a:ea typeface="Inter" pitchFamily="34" charset="-122"/>
+                <a:cs typeface="Inter" pitchFamily="34" charset="-120"/>
+              </a:rPr>
+              <a:t>[Floor is Open]</a:t>
+            </a:r>
+            <a:endParaRPr lang="en-US" sz="3200" dirty="0"/>
           </a:p>
         </p:txBody>
       </p:sp>
@@ -5813,8 +5162,8 @@
         </p:nvSpPr>
         <p:spPr>
           <a:xfrm>
-            <a:off x="8106266" y="3246120"/>
-            <a:ext cx="3308189" cy="2514600"/>
+            <a:off x="1414780" y="3246120"/>
+            <a:ext cx="9365615" cy="2514600"/>
           </a:xfrm>
           <a:prstGeom prst="rect">
             <a:avLst/>
@@ -5832,7 +5181,7 @@
               <a:buNone/>
             </a:pPr>
             <a:r>
-              <a:rPr lang="en-US" sz="1600" dirty="0">
+              <a:rPr lang="en-US" sz="3000" dirty="0">
                 <a:solidFill>
                   <a:srgbClr val="6B6663"/>
                 </a:solidFill>
@@ -5840,9 +5189,9 @@
                 <a:ea typeface="Inter" pitchFamily="34" charset="-122"/>
                 <a:cs typeface="Inter" pitchFamily="34" charset="-120"/>
               </a:rPr>
-              <a:t>[You have X minutes. Work individually or in pairs — raise a hand if you get stuck.]</a:t>
-            </a:r>
-            <a:endParaRPr lang="en-US" sz="1600" dirty="0"/>
+              <a:t>[Short supporting note — e.g. how participants should signal a question.]</a:t>
+            </a:r>
+            <a:endParaRPr lang="en-US" sz="3000" dirty="0"/>
           </a:p>
         </p:txBody>
       </p:sp>
@@ -5878,11 +5227,30 @@
                 <a:ea typeface="Inter" pitchFamily="34" charset="-122"/>
                 <a:cs typeface="Inter" pitchFamily="34" charset="-120"/>
               </a:rPr>
-              <a:t>TEMPLATE  ·  activity_sidebar</a:t>
+              <a:t>TEMPLATE  ·  activity_q&amp;a</a:t>
             </a:r>
             <a:endParaRPr lang="en-US" sz="850" dirty="0"/>
           </a:p>
         </p:txBody>
+      </p:sp>
+      <p:sp>
+        <p:nvSpPr>
+          <p:cNvPr id="6" name="Shape 4"/>
+          <p:cNvSpPr/>
+          <p:nvPr/>
+        </p:nvSpPr>
+        <p:spPr>
+          <a:xfrm flipH="1">
+            <a:off x="545465" y="1003300"/>
+            <a:ext cx="83185" cy="5044440"/>
+          </a:xfrm>
+          <a:prstGeom prst="rect">
+            <a:avLst/>
+          </a:prstGeom>
+          <a:solidFill>
+            <a:srgbClr val="2563EB"/>
+          </a:solidFill>
+        </p:spPr>
       </p:sp>
     </p:spTree>
   </p:cSld>
@@ -5967,30 +5335,99 @@
                 <a:latin typeface="Inter" pitchFamily="34" charset="0"/>
                 <a:ea typeface="Inter" pitchFamily="34" charset="-122"/>
                 <a:cs typeface="Inter" pitchFamily="34" charset="-120"/>
+              </a:rPr>
+              <a:t>✅ QUIZ</a:t>
+            </a:r>
+            <a:r>
+              <a:rPr lang="en-US" sz="1600" b="1" kern="0" spc="150" dirty="0">
+                <a:solidFill>
+                  <a:srgbClr val="2563EB"/>
+                </a:solidFill>
+                <a:latin typeface="Inter" pitchFamily="34" charset="0"/>
+                <a:ea typeface="Inter" pitchFamily="34" charset="-122"/>
+                <a:cs typeface="Inter" pitchFamily="34" charset="-120"/>
                 <a:sym typeface="+mn-ea"/>
               </a:rPr>
-              <a:t>[ACTIVITY NAME] - [PHASE/TOPIC]</a:t>
+              <a:t> - </a:t>
+            </a:r>
+            <a:r>
+              <a:rPr lang="en-US" sz="1600" b="1" kern="0" spc="150" dirty="0">
+                <a:solidFill>
+                  <a:srgbClr val="2563EB"/>
+                </a:solidFill>
+                <a:latin typeface="Inter" pitchFamily="34" charset="0"/>
+                <a:ea typeface="Inter" pitchFamily="34" charset="-122"/>
+                <a:cs typeface="Inter" pitchFamily="34" charset="-120"/>
+              </a:rPr>
+              <a:t>[PHASE]</a:t>
             </a:r>
             <a:endParaRPr lang="en-US" sz="1600" dirty="0"/>
           </a:p>
+        </p:txBody>
+      </p:sp>
+      <p:sp>
+        <p:nvSpPr>
+          <p:cNvPr id="4" name="Text 2"/>
+          <p:cNvSpPr/>
+          <p:nvPr/>
+        </p:nvSpPr>
+        <p:spPr>
+          <a:xfrm>
+            <a:off x="548640" y="768096"/>
+            <a:ext cx="11094415" cy="822960"/>
+          </a:xfrm>
+          <a:prstGeom prst="rect">
+            <a:avLst/>
+          </a:prstGeom>
+          <a:noFill/>
+        </p:spPr>
+        <p:txBody>
+          <a:bodyPr wrap="square" lIns="0" tIns="0" rIns="0" bIns="0" rtlCol="0" anchor="t"/>
+          <a:lstStyle/>
           <a:p>
             <a:pPr marL="0" indent="0">
+              <a:lnSpc>
+                <a:spcPct val="105000"/>
+              </a:lnSpc>
               <a:buNone/>
             </a:pPr>
-            <a:endParaRPr lang="en-US" sz="1600" dirty="0"/>
-          </a:p>
-        </p:txBody>
-      </p:sp>
-      <p:sp>
-        <p:nvSpPr>
-          <p:cNvPr id="9" name="Shape 7"/>
-          <p:cNvSpPr/>
-          <p:nvPr/>
-        </p:nvSpPr>
-        <p:spPr>
-          <a:xfrm>
-            <a:off x="548640" y="996950"/>
-            <a:ext cx="11094720" cy="5045075"/>
+            <a:r>
+              <a:rPr lang="en-US" sz="3200" b="1" dirty="0">
+                <a:solidFill>
+                  <a:srgbClr val="2C2420"/>
+                </a:solidFill>
+                <a:latin typeface="Playfair Display" pitchFamily="34" charset="0"/>
+                <a:ea typeface="Playfair Display" pitchFamily="34" charset="-122"/>
+                <a:cs typeface="Playfair Display" pitchFamily="34" charset="-120"/>
+                <a:sym typeface="+mn-ea"/>
+              </a:rPr>
+              <a:t>[</a:t>
+            </a:r>
+            <a:r>
+              <a:rPr lang="en-US" sz="3200" b="1" dirty="0">
+                <a:solidFill>
+                  <a:srgbClr val="2C2420"/>
+                </a:solidFill>
+                <a:latin typeface="Playfair Display" pitchFamily="34" charset="0"/>
+                <a:ea typeface="Playfair Display" pitchFamily="34" charset="-122"/>
+                <a:cs typeface="Playfair Display" pitchFamily="34" charset="-120"/>
+              </a:rPr>
+              <a:t>Poll Question Goes Here?]</a:t>
+            </a:r>
+            <a:endParaRPr lang="en-US" sz="3200" dirty="0"/>
+          </a:p>
+        </p:txBody>
+      </p:sp>
+      <p:sp>
+        <p:nvSpPr>
+          <p:cNvPr id="5" name="Shape 3"/>
+          <p:cNvSpPr/>
+          <p:nvPr/>
+        </p:nvSpPr>
+        <p:spPr>
+          <a:xfrm>
+            <a:off x="548640" y="1737360"/>
+            <a:ext cx="11094415" cy="777240"/>
           </a:xfrm>
           <a:prstGeom prst="rect">
             <a:avLst/>
@@ -6015,14 +5452,33 @@
       </p:sp>
       <p:sp>
         <p:nvSpPr>
-          <p:cNvPr id="10" name="Text 8"/>
-          <p:cNvSpPr/>
-          <p:nvPr/>
-        </p:nvSpPr>
-        <p:spPr>
-          <a:xfrm>
-            <a:off x="4213081" y="2057400"/>
-            <a:ext cx="3765389" cy="640080"/>
+          <p:cNvPr id="6" name="Shape 4"/>
+          <p:cNvSpPr/>
+          <p:nvPr/>
+        </p:nvSpPr>
+        <p:spPr>
+          <a:xfrm>
+            <a:off x="804672" y="1906524"/>
+            <a:ext cx="548640" cy="438912"/>
+          </a:xfrm>
+          <a:prstGeom prst="rect">
+            <a:avLst/>
+          </a:prstGeom>
+          <a:solidFill>
+            <a:srgbClr val="2563EB"/>
+          </a:solidFill>
+        </p:spPr>
+      </p:sp>
+      <p:sp>
+        <p:nvSpPr>
+          <p:cNvPr id="7" name="Text 5"/>
+          <p:cNvSpPr/>
+          <p:nvPr/>
+        </p:nvSpPr>
+        <p:spPr>
+          <a:xfrm>
+            <a:off x="804672" y="1906524"/>
+            <a:ext cx="548640" cy="438912"/>
           </a:xfrm>
           <a:prstGeom prst="rect">
             <a:avLst/>
@@ -6037,19 +5493,108 @@
               <a:buNone/>
             </a:pPr>
             <a:r>
-              <a:rPr lang="en-US" sz="3400" dirty="0">
-                <a:solidFill>
-                  <a:srgbClr val="000000"/>
-                </a:solidFill>
-                <a:latin typeface="Inter" pitchFamily="34" charset="0"/>
-                <a:ea typeface="Inter" pitchFamily="34" charset="-122"/>
-                <a:cs typeface="Inter" pitchFamily="34" charset="-120"/>
-              </a:rPr>
-              <a:t>🙋</a:t>
-            </a:r>
-            <a:endParaRPr lang="en-US" sz="3400" dirty="0"/>
-          </a:p>
-        </p:txBody>
+              <a:rPr lang="en-US" sz="1800" b="1" dirty="0">
+                <a:solidFill>
+                  <a:srgbClr val="FFFFFF"/>
+                </a:solidFill>
+                <a:latin typeface="Inter" pitchFamily="34" charset="0"/>
+                <a:ea typeface="Inter" pitchFamily="34" charset="-122"/>
+                <a:cs typeface="Inter" pitchFamily="34" charset="-120"/>
+              </a:rPr>
+              <a:t>A</a:t>
+            </a:r>
+            <a:endParaRPr lang="en-US" sz="1800" dirty="0"/>
+          </a:p>
+        </p:txBody>
+      </p:sp>
+      <p:sp>
+        <p:nvSpPr>
+          <p:cNvPr id="8" name="Text 6"/>
+          <p:cNvSpPr/>
+          <p:nvPr/>
+        </p:nvSpPr>
+        <p:spPr>
+          <a:xfrm>
+            <a:off x="1600200" y="1737360"/>
+            <a:ext cx="9722815" cy="777240"/>
+          </a:xfrm>
+          <a:prstGeom prst="rect">
+            <a:avLst/>
+          </a:prstGeom>
+          <a:noFill/>
+        </p:spPr>
+        <p:txBody>
+          <a:bodyPr wrap="square" lIns="0" tIns="0" rIns="0" bIns="0" rtlCol="0" anchor="ctr"/>
+          <a:lstStyle/>
+          <a:p>
+            <a:pPr marL="0" indent="0">
+              <a:buNone/>
+            </a:pPr>
+            <a:r>
+              <a:rPr lang="en-US" sz="3000" dirty="0">
+                <a:solidFill>
+                  <a:srgbClr val="2C2420"/>
+                </a:solidFill>
+                <a:latin typeface="Inter" pitchFamily="34" charset="0"/>
+                <a:ea typeface="Inter" pitchFamily="34" charset="-122"/>
+                <a:cs typeface="Inter" pitchFamily="34" charset="-120"/>
+              </a:rPr>
+              <a:t>[Option A]</a:t>
+            </a:r>
+            <a:endParaRPr lang="en-US" sz="3000" dirty="0"/>
+          </a:p>
+        </p:txBody>
+      </p:sp>
+      <p:sp>
+        <p:nvSpPr>
+          <p:cNvPr id="9" name="Shape 7"/>
+          <p:cNvSpPr/>
+          <p:nvPr/>
+        </p:nvSpPr>
+        <p:spPr>
+          <a:xfrm>
+            <a:off x="548640" y="2697480"/>
+            <a:ext cx="11094415" cy="777240"/>
+          </a:xfrm>
+          <a:prstGeom prst="rect">
+            <a:avLst/>
+          </a:prstGeom>
+          <a:solidFill>
+            <a:srgbClr val="F8F7F6"/>
+          </a:solidFill>
+          <a:ln w="12700">
+            <a:solidFill>
+              <a:srgbClr val="DFDEDD"/>
+            </a:solidFill>
+            <a:prstDash val="solid"/>
+          </a:ln>
+          <a:effectLst>
+            <a:outerShdw blurRad="76200" dist="25400" dir="5400000" algn="bl" rotWithShape="0">
+              <a:srgbClr val="000000">
+                <a:alpha val="16000"/>
+              </a:srgbClr>
+            </a:outerShdw>
+          </a:effectLst>
+        </p:spPr>
+      </p:sp>
+      <p:sp>
+        <p:nvSpPr>
+          <p:cNvPr id="10" name="Shape 8"/>
+          <p:cNvSpPr/>
+          <p:nvPr/>
+        </p:nvSpPr>
+        <p:spPr>
+          <a:xfrm>
+            <a:off x="804672" y="2866644"/>
+            <a:ext cx="548640" cy="438912"/>
+          </a:xfrm>
+          <a:prstGeom prst="rect">
+            <a:avLst/>
+          </a:prstGeom>
+          <a:solidFill>
+            <a:srgbClr val="2563EB"/>
+          </a:solidFill>
+        </p:spPr>
       </p:sp>
       <p:sp>
         <p:nvSpPr>
@@ -6059,8 +5604,8 @@
         </p:nvSpPr>
         <p:spPr>
           <a:xfrm>
-            <a:off x="4395961" y="2697480"/>
-            <a:ext cx="3399629" cy="365760"/>
+            <a:off x="804672" y="2866644"/>
+            <a:ext cx="548640" cy="438912"/>
           </a:xfrm>
           <a:prstGeom prst="rect">
             <a:avLst/>
@@ -6075,17 +5620,17 @@
               <a:buNone/>
             </a:pPr>
             <a:r>
-              <a:rPr lang="en-US" sz="2400" b="1" kern="0" spc="50" dirty="0">
-                <a:solidFill>
-                  <a:srgbClr val="2563EB"/>
-                </a:solidFill>
-                <a:latin typeface="Inter" pitchFamily="34" charset="0"/>
-                <a:ea typeface="Inter" pitchFamily="34" charset="-122"/>
-                <a:cs typeface="Inter" pitchFamily="34" charset="-120"/>
-              </a:rPr>
-              <a:t>[Floor is Open]</a:t>
-            </a:r>
-            <a:endParaRPr lang="en-US" sz="2400" dirty="0"/>
+              <a:rPr lang="en-US" sz="1800" b="1" dirty="0">
+                <a:solidFill>
+                  <a:srgbClr val="FFFFFF"/>
+                </a:solidFill>
+                <a:latin typeface="Inter" pitchFamily="34" charset="0"/>
+                <a:ea typeface="Inter" pitchFamily="34" charset="-122"/>
+                <a:cs typeface="Inter" pitchFamily="34" charset="-120"/>
+              </a:rPr>
+              <a:t>B</a:t>
+            </a:r>
+            <a:endParaRPr lang="en-US" sz="1800" dirty="0"/>
           </a:p>
         </p:txBody>
       </p:sp>
@@ -6097,8 +5642,8 @@
         </p:nvSpPr>
         <p:spPr>
           <a:xfrm>
-            <a:off x="3816350" y="3246120"/>
-            <a:ext cx="4744720" cy="2514600"/>
+            <a:off x="1600200" y="2697480"/>
+            <a:ext cx="9722815" cy="777240"/>
           </a:xfrm>
           <a:prstGeom prst="rect">
             <a:avLst/>
@@ -6106,33 +5651,284 @@
           <a:noFill/>
         </p:spPr>
         <p:txBody>
-          <a:bodyPr wrap="square" lIns="0" tIns="0" rIns="0" bIns="0" rtlCol="0" anchor="t"/>
+          <a:bodyPr wrap="square" lIns="0" tIns="0" rIns="0" bIns="0" rtlCol="0" anchor="ctr"/>
+          <a:lstStyle/>
+          <a:p>
+            <a:pPr marL="0" indent="0">
+              <a:buNone/>
+            </a:pPr>
+            <a:r>
+              <a:rPr lang="en-US" sz="3000" dirty="0">
+                <a:solidFill>
+                  <a:srgbClr val="2C2420"/>
+                </a:solidFill>
+                <a:latin typeface="Inter" pitchFamily="34" charset="0"/>
+                <a:ea typeface="Inter" pitchFamily="34" charset="-122"/>
+                <a:cs typeface="Inter" pitchFamily="34" charset="-120"/>
+              </a:rPr>
+              <a:t>[Option B]</a:t>
+            </a:r>
+            <a:endParaRPr lang="en-US" sz="3000" dirty="0"/>
+          </a:p>
+        </p:txBody>
+      </p:sp>
+      <p:sp>
+        <p:nvSpPr>
+          <p:cNvPr id="13" name="Shape 11"/>
+          <p:cNvSpPr/>
+          <p:nvPr/>
+        </p:nvSpPr>
+        <p:spPr>
+          <a:xfrm>
+            <a:off x="548640" y="3657600"/>
+            <a:ext cx="11094415" cy="777240"/>
+          </a:xfrm>
+          <a:prstGeom prst="rect">
+            <a:avLst/>
+          </a:prstGeom>
+          <a:solidFill>
+            <a:srgbClr val="F8F7F6"/>
+          </a:solidFill>
+          <a:ln w="12700">
+            <a:solidFill>
+              <a:srgbClr val="DFDEDD"/>
+            </a:solidFill>
+            <a:prstDash val="solid"/>
+          </a:ln>
+          <a:effectLst>
+            <a:outerShdw blurRad="76200" dist="25400" dir="5400000" algn="bl" rotWithShape="0">
+              <a:srgbClr val="000000">
+                <a:alpha val="16000"/>
+              </a:srgbClr>
+            </a:outerShdw>
+          </a:effectLst>
+        </p:spPr>
+      </p:sp>
+      <p:sp>
+        <p:nvSpPr>
+          <p:cNvPr id="14" name="Shape 12"/>
+          <p:cNvSpPr/>
+          <p:nvPr/>
+        </p:nvSpPr>
+        <p:spPr>
+          <a:xfrm>
+            <a:off x="804672" y="3826764"/>
+            <a:ext cx="548640" cy="438912"/>
+          </a:xfrm>
+          <a:prstGeom prst="rect">
+            <a:avLst/>
+          </a:prstGeom>
+          <a:solidFill>
+            <a:srgbClr val="2563EB"/>
+          </a:solidFill>
+        </p:spPr>
+      </p:sp>
+      <p:sp>
+        <p:nvSpPr>
+          <p:cNvPr id="15" name="Text 13"/>
+          <p:cNvSpPr/>
+          <p:nvPr/>
+        </p:nvSpPr>
+        <p:spPr>
+          <a:xfrm>
+            <a:off x="804672" y="3826764"/>
+            <a:ext cx="548640" cy="438912"/>
+          </a:xfrm>
+          <a:prstGeom prst="rect">
+            <a:avLst/>
+          </a:prstGeom>
+          <a:noFill/>
+        </p:spPr>
+        <p:txBody>
+          <a:bodyPr wrap="square" lIns="0" tIns="0" rIns="0" bIns="0" rtlCol="0" anchor="ctr"/>
           <a:lstStyle/>
           <a:p>
             <a:pPr marL="0" indent="0" algn="ctr">
-              <a:lnSpc>
-                <a:spcPct val="130000"/>
-              </a:lnSpc>
               <a:buNone/>
             </a:pPr>
             <a:r>
-              <a:rPr lang="en-US" dirty="0">
-                <a:solidFill>
-                  <a:srgbClr val="6B6663"/>
-                </a:solidFill>
-                <a:latin typeface="Inter" pitchFamily="34" charset="0"/>
-                <a:ea typeface="Inter" pitchFamily="34" charset="-122"/>
-                <a:cs typeface="Inter" pitchFamily="34" charset="-120"/>
-              </a:rPr>
-              <a:t>[Short supporting note — e.g. how participants should signal a question.]</a:t>
-            </a:r>
-            <a:endParaRPr lang="en-US" dirty="0"/>
-          </a:p>
-        </p:txBody>
-      </p:sp>
-      <p:sp>
-        <p:nvSpPr>
-          <p:cNvPr id="13" name="Text 11"/>
+              <a:rPr lang="en-US" sz="1800" b="1" dirty="0">
+                <a:solidFill>
+                  <a:srgbClr val="FFFFFF"/>
+                </a:solidFill>
+                <a:latin typeface="Inter" pitchFamily="34" charset="0"/>
+                <a:ea typeface="Inter" pitchFamily="34" charset="-122"/>
+                <a:cs typeface="Inter" pitchFamily="34" charset="-120"/>
+              </a:rPr>
+              <a:t>C</a:t>
+            </a:r>
+            <a:endParaRPr lang="en-US" sz="1800" dirty="0"/>
+          </a:p>
+        </p:txBody>
+      </p:sp>
+      <p:sp>
+        <p:nvSpPr>
+          <p:cNvPr id="16" name="Text 14"/>
+          <p:cNvSpPr/>
+          <p:nvPr/>
+        </p:nvSpPr>
+        <p:spPr>
+          <a:xfrm>
+            <a:off x="1600200" y="3657600"/>
+            <a:ext cx="9722815" cy="777240"/>
+          </a:xfrm>
+          <a:prstGeom prst="rect">
+            <a:avLst/>
+          </a:prstGeom>
+          <a:noFill/>
+        </p:spPr>
+        <p:txBody>
+          <a:bodyPr wrap="square" lIns="0" tIns="0" rIns="0" bIns="0" rtlCol="0" anchor="ctr"/>
+          <a:lstStyle/>
+          <a:p>
+            <a:pPr marL="0" indent="0">
+              <a:buNone/>
+            </a:pPr>
+            <a:r>
+              <a:rPr lang="en-US" sz="3000" dirty="0">
+                <a:solidFill>
+                  <a:srgbClr val="2C2420"/>
+                </a:solidFill>
+                <a:latin typeface="Inter" pitchFamily="34" charset="0"/>
+                <a:ea typeface="Inter" pitchFamily="34" charset="-122"/>
+                <a:cs typeface="Inter" pitchFamily="34" charset="-120"/>
+              </a:rPr>
+              <a:t>[Option C]</a:t>
+            </a:r>
+            <a:endParaRPr lang="en-US" sz="3000" dirty="0"/>
+          </a:p>
+        </p:txBody>
+      </p:sp>
+      <p:sp>
+        <p:nvSpPr>
+          <p:cNvPr id="17" name="Shape 15"/>
+          <p:cNvSpPr/>
+          <p:nvPr/>
+        </p:nvSpPr>
+        <p:spPr>
+          <a:xfrm>
+            <a:off x="548640" y="4617720"/>
+            <a:ext cx="11094415" cy="777240"/>
+          </a:xfrm>
+          <a:prstGeom prst="rect">
+            <a:avLst/>
+          </a:prstGeom>
+          <a:solidFill>
+            <a:srgbClr val="F8F7F6"/>
+          </a:solidFill>
+          <a:ln w="12700">
+            <a:solidFill>
+              <a:srgbClr val="DFDEDD"/>
+            </a:solidFill>
+            <a:prstDash val="solid"/>
+          </a:ln>
+          <a:effectLst>
+            <a:outerShdw blurRad="76200" dist="25400" dir="5400000" algn="bl" rotWithShape="0">
+              <a:srgbClr val="000000">
+                <a:alpha val="16000"/>
+              </a:srgbClr>
+            </a:outerShdw>
+          </a:effectLst>
+        </p:spPr>
+      </p:sp>
+      <p:sp>
+        <p:nvSpPr>
+          <p:cNvPr id="18" name="Shape 16"/>
+          <p:cNvSpPr/>
+          <p:nvPr/>
+        </p:nvSpPr>
+        <p:spPr>
+          <a:xfrm>
+            <a:off x="804672" y="4786884"/>
+            <a:ext cx="548640" cy="438912"/>
+          </a:xfrm>
+          <a:prstGeom prst="rect">
+            <a:avLst/>
+          </a:prstGeom>
+          <a:solidFill>
+            <a:srgbClr val="2563EB"/>
+          </a:solidFill>
+        </p:spPr>
+      </p:sp>
+      <p:sp>
+        <p:nvSpPr>
+          <p:cNvPr id="19" name="Text 17"/>
+          <p:cNvSpPr/>
+          <p:nvPr/>
+        </p:nvSpPr>
+        <p:spPr>
+          <a:xfrm>
+            <a:off x="804672" y="4786884"/>
+            <a:ext cx="548640" cy="438912"/>
+          </a:xfrm>
+          <a:prstGeom prst="rect">
+            <a:avLst/>
+          </a:prstGeom>
+          <a:noFill/>
+        </p:spPr>
+        <p:txBody>
+          <a:bodyPr wrap="square" lIns="0" tIns="0" rIns="0" bIns="0" rtlCol="0" anchor="ctr"/>
+          <a:lstStyle/>
+          <a:p>
+            <a:pPr marL="0" indent="0" algn="ctr">
+              <a:buNone/>
+            </a:pPr>
+            <a:r>
+              <a:rPr lang="en-US" sz="1800" b="1" dirty="0">
+                <a:solidFill>
+                  <a:srgbClr val="FFFFFF"/>
+                </a:solidFill>
+                <a:latin typeface="Inter" pitchFamily="34" charset="0"/>
+                <a:ea typeface="Inter" pitchFamily="34" charset="-122"/>
+                <a:cs typeface="Inter" pitchFamily="34" charset="-120"/>
+              </a:rPr>
+              <a:t>D</a:t>
+            </a:r>
+            <a:endParaRPr lang="en-US" sz="1800" dirty="0"/>
+          </a:p>
+        </p:txBody>
+      </p:sp>
+      <p:sp>
+        <p:nvSpPr>
+          <p:cNvPr id="20" name="Text 18"/>
+          <p:cNvSpPr/>
+          <p:nvPr/>
+        </p:nvSpPr>
+        <p:spPr>
+          <a:xfrm>
+            <a:off x="1600200" y="4617720"/>
+            <a:ext cx="9722815" cy="777240"/>
+          </a:xfrm>
+          <a:prstGeom prst="rect">
+            <a:avLst/>
+          </a:prstGeom>
+          <a:noFill/>
+        </p:spPr>
+        <p:txBody>
+          <a:bodyPr wrap="square" lIns="0" tIns="0" rIns="0" bIns="0" rtlCol="0" anchor="ctr"/>
+          <a:lstStyle/>
+          <a:p>
+            <a:pPr marL="0" indent="0">
+              <a:buNone/>
+            </a:pPr>
+            <a:r>
+              <a:rPr lang="en-US" sz="3000" dirty="0">
+                <a:solidFill>
+                  <a:srgbClr val="2C2420"/>
+                </a:solidFill>
+                <a:latin typeface="Inter" pitchFamily="34" charset="0"/>
+                <a:ea typeface="Inter" pitchFamily="34" charset="-122"/>
+                <a:cs typeface="Inter" pitchFamily="34" charset="-120"/>
+              </a:rPr>
+              <a:t>[Option D]</a:t>
+            </a:r>
+            <a:endParaRPr lang="en-US" sz="3000" dirty="0"/>
+          </a:p>
+        </p:txBody>
+      </p:sp>
+      <p:sp>
+        <p:nvSpPr>
+          <p:cNvPr id="21" name="Text 19"/>
           <p:cNvSpPr/>
           <p:nvPr/>
         </p:nvSpPr>
@@ -6162,30 +5958,11 @@
                 <a:ea typeface="Inter" pitchFamily="34" charset="-122"/>
                 <a:cs typeface="Inter" pitchFamily="34" charset="-120"/>
               </a:rPr>
-              <a:t>TEMPLATE  ·  activity_q&amp;a</a:t>
+              <a:t>TEMPLATE  ·  live_poll</a:t>
             </a:r>
             <a:endParaRPr lang="en-US" sz="850" dirty="0"/>
           </a:p>
         </p:txBody>
-      </p:sp>
-      <p:sp>
-        <p:nvSpPr>
-          <p:cNvPr id="6" name="Shape 4"/>
-          <p:cNvSpPr/>
-          <p:nvPr/>
-        </p:nvSpPr>
-        <p:spPr>
-          <a:xfrm flipH="1">
-            <a:off x="545465" y="1003300"/>
-            <a:ext cx="83185" cy="5044440"/>
-          </a:xfrm>
-          <a:prstGeom prst="rect">
-            <a:avLst/>
-          </a:prstGeom>
-          <a:solidFill>
-            <a:srgbClr val="2563EB"/>
-          </a:solidFill>
-        </p:spPr>
       </p:sp>
     </p:spTree>
   </p:cSld>
@@ -6196,6 +5973,591 @@
 </file>
 
 <file path=ppt/slides/slide8.xml><?xml version="1.0" encoding="utf-8"?>
+<p:sld xmlns:a="http://schemas.openxmlformats.org/drawingml/2006/main" xmlns:r="http://schemas.openxmlformats.org/officeDocument/2006/relationships" xmlns:p="http://schemas.openxmlformats.org/presentationml/2006/main">
+  <p:cSld>
+    <p:spTree>
+      <p:nvGrpSpPr>
+        <p:cNvPr id="1" name=""/>
+        <p:cNvGrpSpPr/>
+        <p:nvPr/>
+      </p:nvGrpSpPr>
+      <p:grpSpPr>
+        <a:xfrm>
+          <a:off x="0" y="0"/>
+          <a:ext cx="0" cy="0"/>
+          <a:chOff x="0" y="0"/>
+          <a:chExt cx="0" cy="0"/>
+        </a:xfrm>
+      </p:grpSpPr>
+      <p:sp>
+        <p:nvSpPr>
+          <p:cNvPr id="2" name="Shape 0"/>
+          <p:cNvSpPr/>
+          <p:nvPr/>
+        </p:nvSpPr>
+        <p:spPr>
+          <a:xfrm>
+            <a:off x="0" y="0"/>
+            <a:ext cx="82296" cy="6858000"/>
+          </a:xfrm>
+          <a:prstGeom prst="rect">
+            <a:avLst/>
+          </a:prstGeom>
+          <a:solidFill>
+            <a:srgbClr val="6D28D9"/>
+          </a:solidFill>
+        </p:spPr>
+      </p:sp>
+      <p:sp>
+        <p:nvSpPr>
+          <p:cNvPr id="3" name="Text 1"/>
+          <p:cNvSpPr/>
+          <p:nvPr/>
+        </p:nvSpPr>
+        <p:spPr>
+          <a:xfrm>
+            <a:off x="548640" y="457200"/>
+            <a:ext cx="11094415" cy="292608"/>
+          </a:xfrm>
+          <a:prstGeom prst="rect">
+            <a:avLst/>
+          </a:prstGeom>
+          <a:noFill/>
+        </p:spPr>
+        <p:txBody>
+          <a:bodyPr wrap="square" lIns="0" tIns="0" rIns="0" bIns="0" rtlCol="0" anchor="t"/>
+          <a:lstStyle/>
+          <a:p>
+            <a:pPr marL="0" indent="0">
+              <a:buNone/>
+            </a:pPr>
+            <a:r>
+              <a:rPr lang="en-US" sz="1600" b="1" kern="0" spc="150" dirty="0">
+                <a:solidFill>
+                  <a:srgbClr val="6D28D9"/>
+                </a:solidFill>
+                <a:latin typeface="Inter" pitchFamily="34" charset="0"/>
+                <a:ea typeface="Inter" pitchFamily="34" charset="-122"/>
+                <a:cs typeface="Inter" pitchFamily="34" charset="-120"/>
+                <a:sym typeface="+mn-ea"/>
+              </a:rPr>
+              <a:t>🔄 DEBRIEF - </a:t>
+            </a:r>
+            <a:r>
+              <a:rPr lang="en-US" sz="1600" b="1" kern="0" spc="150" dirty="0">
+                <a:solidFill>
+                  <a:srgbClr val="6D28D9"/>
+                </a:solidFill>
+                <a:latin typeface="Inter" pitchFamily="34" charset="0"/>
+                <a:ea typeface="Inter" pitchFamily="34" charset="-122"/>
+                <a:cs typeface="Inter" pitchFamily="34" charset="-120"/>
+              </a:rPr>
+              <a:t>[PHASE]</a:t>
+            </a:r>
+            <a:endParaRPr lang="en-US" sz="1600" dirty="0"/>
+          </a:p>
+        </p:txBody>
+      </p:sp>
+      <p:sp>
+        <p:nvSpPr>
+          <p:cNvPr id="4" name="Text 2"/>
+          <p:cNvSpPr/>
+          <p:nvPr/>
+        </p:nvSpPr>
+        <p:spPr>
+          <a:xfrm>
+            <a:off x="548640" y="768096"/>
+            <a:ext cx="11094415" cy="822960"/>
+          </a:xfrm>
+          <a:prstGeom prst="rect">
+            <a:avLst/>
+          </a:prstGeom>
+          <a:noFill/>
+        </p:spPr>
+        <p:txBody>
+          <a:bodyPr wrap="square" lIns="0" tIns="0" rIns="0" bIns="0" rtlCol="0" anchor="t"/>
+          <a:lstStyle/>
+          <a:p>
+            <a:pPr marL="0" indent="0">
+              <a:lnSpc>
+                <a:spcPct val="105000"/>
+              </a:lnSpc>
+              <a:buNone/>
+            </a:pPr>
+            <a:endParaRPr lang="en-US" sz="3000" dirty="0"/>
+          </a:p>
+        </p:txBody>
+      </p:sp>
+      <p:sp>
+        <p:nvSpPr>
+          <p:cNvPr id="5" name="Shape 3"/>
+          <p:cNvSpPr/>
+          <p:nvPr/>
+        </p:nvSpPr>
+        <p:spPr>
+          <a:xfrm>
+            <a:off x="548640" y="915035"/>
+            <a:ext cx="11094720" cy="2102485"/>
+          </a:xfrm>
+          <a:prstGeom prst="rect">
+            <a:avLst/>
+          </a:prstGeom>
+          <a:solidFill>
+            <a:srgbClr val="F8F7F6"/>
+          </a:solidFill>
+          <a:ln w="12700">
+            <a:solidFill>
+              <a:srgbClr val="DFDEDD"/>
+            </a:solidFill>
+            <a:prstDash val="solid"/>
+          </a:ln>
+          <a:effectLst>
+            <a:outerShdw blurRad="76200" dist="25400" dir="5400000" algn="bl" rotWithShape="0">
+              <a:srgbClr val="000000">
+                <a:alpha val="16000"/>
+              </a:srgbClr>
+            </a:outerShdw>
+          </a:effectLst>
+        </p:spPr>
+      </p:sp>
+      <p:sp>
+        <p:nvSpPr>
+          <p:cNvPr id="6" name="Shape 4"/>
+          <p:cNvSpPr/>
+          <p:nvPr/>
+        </p:nvSpPr>
+        <p:spPr>
+          <a:xfrm>
+            <a:off x="548640" y="915670"/>
+            <a:ext cx="76200" cy="2101850"/>
+          </a:xfrm>
+          <a:prstGeom prst="rect">
+            <a:avLst/>
+          </a:prstGeom>
+          <a:solidFill>
+            <a:srgbClr val="6D28D9"/>
+          </a:solidFill>
+        </p:spPr>
+      </p:sp>
+      <p:sp>
+        <p:nvSpPr>
+          <p:cNvPr id="7" name="Text 5"/>
+          <p:cNvSpPr/>
+          <p:nvPr/>
+        </p:nvSpPr>
+        <p:spPr>
+          <a:xfrm>
+            <a:off x="749808" y="1101471"/>
+            <a:ext cx="10692079" cy="274320"/>
+          </a:xfrm>
+          <a:prstGeom prst="rect">
+            <a:avLst/>
+          </a:prstGeom>
+          <a:noFill/>
+        </p:spPr>
+        <p:txBody>
+          <a:bodyPr wrap="square" lIns="0" tIns="0" rIns="0" bIns="0" rtlCol="0" anchor="t"/>
+          <a:lstStyle/>
+          <a:p>
+            <a:pPr marL="0" indent="0">
+              <a:buNone/>
+            </a:pPr>
+            <a:r>
+              <a:rPr lang="en-US" sz="1600" b="1" kern="0" spc="50" dirty="0">
+                <a:solidFill>
+                  <a:srgbClr val="6D28D9"/>
+                </a:solidFill>
+                <a:latin typeface="Inter" pitchFamily="34" charset="0"/>
+                <a:ea typeface="Inter" pitchFamily="34" charset="-122"/>
+                <a:cs typeface="Inter" pitchFamily="34" charset="-120"/>
+              </a:rPr>
+              <a:t>SUGGESTED ANSWER</a:t>
+            </a:r>
+            <a:endParaRPr lang="en-US" sz="1600" dirty="0"/>
+          </a:p>
+        </p:txBody>
+      </p:sp>
+      <p:sp>
+        <p:nvSpPr>
+          <p:cNvPr id="8" name="Text 6"/>
+          <p:cNvSpPr/>
+          <p:nvPr/>
+        </p:nvSpPr>
+        <p:spPr>
+          <a:xfrm>
+            <a:off x="749808" y="1465453"/>
+            <a:ext cx="10692079" cy="777240"/>
+          </a:xfrm>
+          <a:prstGeom prst="rect">
+            <a:avLst/>
+          </a:prstGeom>
+          <a:noFill/>
+        </p:spPr>
+        <p:txBody>
+          <a:bodyPr wrap="square" lIns="0" tIns="0" rIns="0" bIns="0" rtlCol="0" anchor="t"/>
+          <a:lstStyle/>
+          <a:p>
+            <a:pPr marL="0" indent="0">
+              <a:lnSpc>
+                <a:spcPct val="130000"/>
+              </a:lnSpc>
+              <a:buNone/>
+            </a:pPr>
+            <a:r>
+              <a:rPr lang="en-US" dirty="0">
+                <a:solidFill>
+                  <a:srgbClr val="2C2420"/>
+                </a:solidFill>
+                <a:latin typeface="Inter" pitchFamily="34" charset="0"/>
+                <a:ea typeface="Inter" pitchFamily="34" charset="-122"/>
+                <a:cs typeface="Inter" pitchFamily="34" charset="-120"/>
+              </a:rPr>
+              <a:t>[Summarize the correct answer or ideal response to the activity prompt, so you can compare it against what groups came up with.]</a:t>
+            </a:r>
+            <a:endParaRPr lang="en-US" dirty="0"/>
+          </a:p>
+        </p:txBody>
+      </p:sp>
+      <p:sp>
+        <p:nvSpPr>
+          <p:cNvPr id="9" name="Shape 7"/>
+          <p:cNvSpPr/>
+          <p:nvPr/>
+        </p:nvSpPr>
+        <p:spPr>
+          <a:xfrm>
+            <a:off x="548640" y="3246120"/>
+            <a:ext cx="5432908" cy="2788920"/>
+          </a:xfrm>
+          <a:prstGeom prst="rect">
+            <a:avLst/>
+          </a:prstGeom>
+          <a:solidFill>
+            <a:srgbClr val="F8F7F6"/>
+          </a:solidFill>
+          <a:ln w="12700">
+            <a:solidFill>
+              <a:srgbClr val="DFDEDD"/>
+            </a:solidFill>
+            <a:prstDash val="solid"/>
+          </a:ln>
+          <a:effectLst>
+            <a:outerShdw blurRad="76200" dist="25400" dir="5400000" algn="bl" rotWithShape="0">
+              <a:srgbClr val="000000">
+                <a:alpha val="16000"/>
+              </a:srgbClr>
+            </a:outerShdw>
+          </a:effectLst>
+        </p:spPr>
+      </p:sp>
+      <p:sp>
+        <p:nvSpPr>
+          <p:cNvPr id="10" name="Text 8"/>
+          <p:cNvSpPr/>
+          <p:nvPr/>
+        </p:nvSpPr>
+        <p:spPr>
+          <a:xfrm>
+            <a:off x="749808" y="3374136"/>
+            <a:ext cx="5030572" cy="274320"/>
+          </a:xfrm>
+          <a:prstGeom prst="rect">
+            <a:avLst/>
+          </a:prstGeom>
+          <a:noFill/>
+        </p:spPr>
+        <p:txBody>
+          <a:bodyPr wrap="square" lIns="0" tIns="0" rIns="0" bIns="0" rtlCol="0" anchor="t"/>
+          <a:lstStyle/>
+          <a:p>
+            <a:pPr marL="0" indent="0">
+              <a:buNone/>
+            </a:pPr>
+            <a:r>
+              <a:rPr lang="en-US" sz="1600" b="1" kern="0" spc="50" dirty="0">
+                <a:solidFill>
+                  <a:srgbClr val="6D28D9"/>
+                </a:solidFill>
+                <a:latin typeface="Inter" pitchFamily="34" charset="0"/>
+                <a:ea typeface="Inter" pitchFamily="34" charset="-122"/>
+                <a:cs typeface="Inter" pitchFamily="34" charset="-120"/>
+              </a:rPr>
+              <a:t>COMMON MISCONCEPTIONS</a:t>
+            </a:r>
+            <a:endParaRPr lang="en-US" sz="1600" dirty="0"/>
+          </a:p>
+        </p:txBody>
+      </p:sp>
+      <p:sp>
+        <p:nvSpPr>
+          <p:cNvPr id="11" name="Text 9"/>
+          <p:cNvSpPr/>
+          <p:nvPr/>
+        </p:nvSpPr>
+        <p:spPr>
+          <a:xfrm>
+            <a:off x="749808" y="3749040"/>
+            <a:ext cx="5030572" cy="2103120"/>
+          </a:xfrm>
+          <a:prstGeom prst="rect">
+            <a:avLst/>
+          </a:prstGeom>
+          <a:noFill/>
+        </p:spPr>
+        <p:txBody>
+          <a:bodyPr wrap="square" lIns="0" tIns="0" rIns="0" bIns="0" rtlCol="0" anchor="t"/>
+          <a:lstStyle/>
+          <a:p>
+            <a:pPr marL="342900" indent="-342900">
+              <a:lnSpc>
+                <a:spcPct val="125000"/>
+              </a:lnSpc>
+              <a:spcAft>
+                <a:spcPts val="800"/>
+              </a:spcAft>
+              <a:buSzPct val="100000"/>
+              <a:buChar char="•"/>
+            </a:pPr>
+            <a:r>
+              <a:rPr lang="en-US" sz="1600" dirty="0">
+                <a:solidFill>
+                  <a:srgbClr val="2C2420"/>
+                </a:solidFill>
+                <a:latin typeface="Inter" pitchFamily="34" charset="0"/>
+                <a:ea typeface="Inter" pitchFamily="34" charset="-122"/>
+                <a:cs typeface="Inter" pitchFamily="34" charset="-120"/>
+              </a:rPr>
+              <a:t>[Misconception participants often have]</a:t>
+            </a:r>
+            <a:endParaRPr lang="en-US" sz="1600" dirty="0"/>
+          </a:p>
+          <a:p>
+            <a:pPr marL="342900" indent="-342900">
+              <a:lnSpc>
+                <a:spcPct val="125000"/>
+              </a:lnSpc>
+              <a:spcAft>
+                <a:spcPts val="800"/>
+              </a:spcAft>
+              <a:buSzPct val="100000"/>
+              <a:buChar char="•"/>
+            </a:pPr>
+            <a:r>
+              <a:rPr lang="en-US" sz="1600" dirty="0">
+                <a:solidFill>
+                  <a:srgbClr val="2C2420"/>
+                </a:solidFill>
+                <a:latin typeface="Inter" pitchFamily="34" charset="0"/>
+                <a:ea typeface="Inter" pitchFamily="34" charset="-122"/>
+                <a:cs typeface="Inter" pitchFamily="34" charset="-120"/>
+              </a:rPr>
+              <a:t>[A second common mistake or gap]</a:t>
+            </a:r>
+            <a:endParaRPr lang="en-US" sz="1600" dirty="0"/>
+          </a:p>
+          <a:p>
+            <a:pPr marL="342900" indent="-342900">
+              <a:lnSpc>
+                <a:spcPct val="125000"/>
+              </a:lnSpc>
+              <a:spcAft>
+                <a:spcPts val="800"/>
+              </a:spcAft>
+              <a:buSzPct val="100000"/>
+              <a:buChar char="•"/>
+            </a:pPr>
+            <a:r>
+              <a:rPr lang="en-US" sz="1600" dirty="0">
+                <a:solidFill>
+                  <a:srgbClr val="2C2420"/>
+                </a:solidFill>
+                <a:latin typeface="Inter" pitchFamily="34" charset="0"/>
+                <a:ea typeface="Inter" pitchFamily="34" charset="-122"/>
+                <a:cs typeface="Inter" pitchFamily="34" charset="-120"/>
+              </a:rPr>
+              <a:t>[Why this misconception happens]</a:t>
+            </a:r>
+            <a:endParaRPr lang="en-US" sz="1600" dirty="0"/>
+          </a:p>
+        </p:txBody>
+      </p:sp>
+      <p:sp>
+        <p:nvSpPr>
+          <p:cNvPr id="12" name="Shape 10"/>
+          <p:cNvSpPr/>
+          <p:nvPr/>
+        </p:nvSpPr>
+        <p:spPr>
+          <a:xfrm>
+            <a:off x="6210148" y="3246120"/>
+            <a:ext cx="5432908" cy="2788920"/>
+          </a:xfrm>
+          <a:prstGeom prst="rect">
+            <a:avLst/>
+          </a:prstGeom>
+          <a:solidFill>
+            <a:srgbClr val="F8F7F6"/>
+          </a:solidFill>
+          <a:ln w="12700">
+            <a:solidFill>
+              <a:srgbClr val="DFDEDD"/>
+            </a:solidFill>
+            <a:prstDash val="solid"/>
+          </a:ln>
+          <a:effectLst>
+            <a:outerShdw blurRad="76200" dist="25400" dir="5400000" algn="bl" rotWithShape="0">
+              <a:srgbClr val="000000">
+                <a:alpha val="16000"/>
+              </a:srgbClr>
+            </a:outerShdw>
+          </a:effectLst>
+        </p:spPr>
+      </p:sp>
+      <p:sp>
+        <p:nvSpPr>
+          <p:cNvPr id="13" name="Shape 11"/>
+          <p:cNvSpPr/>
+          <p:nvPr/>
+        </p:nvSpPr>
+        <p:spPr>
+          <a:xfrm>
+            <a:off x="6210148" y="3246120"/>
+            <a:ext cx="41148" cy="2788920"/>
+          </a:xfrm>
+          <a:prstGeom prst="rect">
+            <a:avLst/>
+          </a:prstGeom>
+          <a:solidFill>
+            <a:srgbClr val="865C1D"/>
+          </a:solidFill>
+        </p:spPr>
+      </p:sp>
+      <p:sp>
+        <p:nvSpPr>
+          <p:cNvPr id="14" name="Text 12"/>
+          <p:cNvSpPr/>
+          <p:nvPr/>
+        </p:nvSpPr>
+        <p:spPr>
+          <a:xfrm>
+            <a:off x="6411316" y="3374136"/>
+            <a:ext cx="5030572" cy="274320"/>
+          </a:xfrm>
+          <a:prstGeom prst="rect">
+            <a:avLst/>
+          </a:prstGeom>
+          <a:noFill/>
+        </p:spPr>
+        <p:txBody>
+          <a:bodyPr wrap="square" lIns="0" tIns="0" rIns="0" bIns="0" rtlCol="0" anchor="t"/>
+          <a:lstStyle/>
+          <a:p>
+            <a:pPr marL="0" indent="0">
+              <a:buNone/>
+            </a:pPr>
+            <a:r>
+              <a:rPr lang="en-US" sz="1600" b="1" kern="0" spc="50" dirty="0">
+                <a:solidFill>
+                  <a:srgbClr val="865C1D"/>
+                </a:solidFill>
+                <a:latin typeface="Inter" pitchFamily="34" charset="0"/>
+                <a:ea typeface="Inter" pitchFamily="34" charset="-122"/>
+                <a:cs typeface="Inter" pitchFamily="34" charset="-120"/>
+              </a:rPr>
+              <a:t>KEY TAKEAWAY</a:t>
+            </a:r>
+            <a:endParaRPr lang="en-US" sz="1600" dirty="0"/>
+          </a:p>
+        </p:txBody>
+      </p:sp>
+      <p:sp>
+        <p:nvSpPr>
+          <p:cNvPr id="15" name="Text 13"/>
+          <p:cNvSpPr/>
+          <p:nvPr/>
+        </p:nvSpPr>
+        <p:spPr>
+          <a:xfrm>
+            <a:off x="6411316" y="3749040"/>
+            <a:ext cx="5030572" cy="2103120"/>
+          </a:xfrm>
+          <a:prstGeom prst="rect">
+            <a:avLst/>
+          </a:prstGeom>
+          <a:noFill/>
+        </p:spPr>
+        <p:txBody>
+          <a:bodyPr wrap="square" lIns="0" tIns="0" rIns="0" bIns="0" rtlCol="0" anchor="t"/>
+          <a:lstStyle/>
+          <a:p>
+            <a:pPr marL="0" indent="0">
+              <a:lnSpc>
+                <a:spcPct val="130000"/>
+              </a:lnSpc>
+              <a:buNone/>
+            </a:pPr>
+            <a:r>
+              <a:rPr lang="en-US" sz="1600" dirty="0">
+                <a:solidFill>
+                  <a:srgbClr val="2C2420"/>
+                </a:solidFill>
+                <a:latin typeface="Inter" pitchFamily="34" charset="0"/>
+                <a:ea typeface="Inter" pitchFamily="34" charset="-122"/>
+                <a:cs typeface="Inter" pitchFamily="34" charset="-120"/>
+              </a:rPr>
+              <a:t>[State the one main insight participants should leave with, and tie it explicitly back to the learning goal for this section.]</a:t>
+            </a:r>
+            <a:endParaRPr lang="en-US" sz="1600" dirty="0"/>
+          </a:p>
+        </p:txBody>
+      </p:sp>
+      <p:sp>
+        <p:nvSpPr>
+          <p:cNvPr id="16" name="Text 14"/>
+          <p:cNvSpPr/>
+          <p:nvPr/>
+        </p:nvSpPr>
+        <p:spPr>
+          <a:xfrm>
+            <a:off x="8899855" y="6473952"/>
+            <a:ext cx="3108960" cy="274320"/>
+          </a:xfrm>
+          <a:prstGeom prst="rect">
+            <a:avLst/>
+          </a:prstGeom>
+          <a:noFill/>
+        </p:spPr>
+        <p:txBody>
+          <a:bodyPr wrap="square" lIns="0" tIns="0" rIns="0" bIns="0" rtlCol="0" anchor="ctr"/>
+          <a:lstStyle/>
+          <a:p>
+            <a:pPr marL="0" indent="0" algn="r">
+              <a:buNone/>
+            </a:pPr>
+            <a:r>
+              <a:rPr lang="en-US" sz="850" kern="0" spc="50" dirty="0">
+                <a:solidFill>
+                  <a:srgbClr val="6B6663"/>
+                </a:solidFill>
+                <a:latin typeface="Inter" pitchFamily="34" charset="0"/>
+                <a:ea typeface="Inter" pitchFamily="34" charset="-122"/>
+                <a:cs typeface="Inter" pitchFamily="34" charset="-120"/>
+              </a:rPr>
+              <a:t>TEMPLATE  ·  debrief</a:t>
+            </a:r>
+            <a:endParaRPr lang="en-US" sz="850" dirty="0"/>
+          </a:p>
+        </p:txBody>
+      </p:sp>
+    </p:spTree>
+  </p:cSld>
+  <p:clrMapOvr>
+    <a:masterClrMapping/>
+  </p:clrMapOvr>
+</p:sld>
+</file>
+
+<file path=ppt/slides/slide9.xml><?xml version="1.0" encoding="utf-8"?>
 <p:sld xmlns:a="http://schemas.openxmlformats.org/drawingml/2006/main" xmlns:r="http://schemas.openxmlformats.org/officeDocument/2006/relationships" xmlns:p="http://schemas.openxmlformats.org/presentationml/2006/main">
   <p:cSld>
     <p:bg>
@@ -6235,7 +6597,7 @@
             <a:avLst/>
           </a:prstGeom>
           <a:solidFill>
-            <a:srgbClr val="2563EB"/>
+            <a:srgbClr val="6D28D9"/>
           </a:solidFill>
         </p:spPr>
       </p:sp>
@@ -6265,36 +6627,14 @@
             <a:r>
               <a:rPr lang="en-US" sz="1600" b="1" kern="0" spc="150" dirty="0">
                 <a:solidFill>
-                  <a:srgbClr val="2563EB"/>
-                </a:solidFill>
-                <a:latin typeface="Inter" pitchFamily="34" charset="0"/>
-                <a:ea typeface="Inter" pitchFamily="34" charset="-122"/>
-                <a:cs typeface="Inter" pitchFamily="34" charset="-120"/>
-              </a:rPr>
-              <a:t>✅ QUIZ</a:t>
-            </a:r>
-            <a:r>
-              <a:rPr lang="en-US" sz="1600" b="1" kern="0" spc="150" dirty="0">
-                <a:solidFill>
-                  <a:srgbClr val="2563EB"/>
+                  <a:srgbClr val="6D28D9"/>
                 </a:solidFill>
                 <a:latin typeface="Inter" pitchFamily="34" charset="0"/>
                 <a:ea typeface="Inter" pitchFamily="34" charset="-122"/>
                 <a:cs typeface="Inter" pitchFamily="34" charset="-120"/>
                 <a:sym typeface="+mn-ea"/>
               </a:rPr>
-              <a:t> - </a:t>
-            </a:r>
-            <a:r>
-              <a:rPr lang="en-US" sz="1600" b="1" kern="0" spc="150" dirty="0">
-                <a:solidFill>
-                  <a:srgbClr val="2563EB"/>
-                </a:solidFill>
-                <a:latin typeface="Inter" pitchFamily="34" charset="0"/>
-                <a:ea typeface="Inter" pitchFamily="34" charset="-122"/>
-                <a:cs typeface="Inter" pitchFamily="34" charset="-120"/>
-              </a:rPr>
-              <a:t>[PHASE]</a:t>
+              <a:t>📖 LECTURE</a:t>
             </a:r>
             <a:endParaRPr lang="en-US" sz="1600" dirty="0"/>
           </a:p>
@@ -6334,12 +6674,101 @@
                 <a:latin typeface="Playfair Display" pitchFamily="34" charset="0"/>
                 <a:ea typeface="Playfair Display" pitchFamily="34" charset="-122"/>
                 <a:cs typeface="Playfair Display" pitchFamily="34" charset="-120"/>
-                <a:sym typeface="+mn-ea"/>
-              </a:rPr>
-              <a:t>[</a:t>
-            </a:r>
-            <a:r>
-              <a:rPr lang="en-US" sz="3000" b="1" dirty="0">
+              </a:rPr>
+              <a:t>[Placeholder] - [Lecture Topic]</a:t>
+            </a:r>
+            <a:endParaRPr lang="en-US" sz="3000" dirty="0"/>
+          </a:p>
+        </p:txBody>
+      </p:sp>
+      <p:sp>
+        <p:nvSpPr>
+          <p:cNvPr id="5" name="Shape 3"/>
+          <p:cNvSpPr/>
+          <p:nvPr/>
+        </p:nvSpPr>
+        <p:spPr>
+          <a:xfrm>
+            <a:off x="548640" y="1600200"/>
+            <a:ext cx="11094415" cy="4434840"/>
+          </a:xfrm>
+          <a:prstGeom prst="rect">
+            <a:avLst/>
+          </a:prstGeom>
+          <a:solidFill>
+            <a:srgbClr val="F8F7F6"/>
+          </a:solidFill>
+          <a:ln w="19050">
+            <a:solidFill>
+              <a:srgbClr val="6D28D9"/>
+            </a:solidFill>
+            <a:prstDash val="dash"/>
+          </a:ln>
+        </p:spPr>
+      </p:sp>
+      <p:sp>
+        <p:nvSpPr>
+          <p:cNvPr id="6" name="Text 4"/>
+          <p:cNvSpPr/>
+          <p:nvPr/>
+        </p:nvSpPr>
+        <p:spPr>
+          <a:xfrm>
+            <a:off x="548640" y="2971800"/>
+            <a:ext cx="11094415" cy="731520"/>
+          </a:xfrm>
+          <a:prstGeom prst="rect">
+            <a:avLst/>
+          </a:prstGeom>
+          <a:noFill/>
+        </p:spPr>
+        <p:txBody>
+          <a:bodyPr wrap="square" lIns="0" tIns="0" rIns="0" bIns="0" rtlCol="0" anchor="ctr"/>
+          <a:lstStyle/>
+          <a:p>
+            <a:pPr marL="0" indent="0" algn="ctr">
+              <a:buNone/>
+            </a:pPr>
+            <a:r>
+              <a:rPr lang="en-US" sz="3600" dirty="0">
+                <a:solidFill>
+                  <a:srgbClr val="000000"/>
+                </a:solidFill>
+                <a:latin typeface="Inter" pitchFamily="34" charset="0"/>
+                <a:ea typeface="Inter" pitchFamily="34" charset="-122"/>
+                <a:cs typeface="Inter" pitchFamily="34" charset="-120"/>
+              </a:rPr>
+              <a:t>📝</a:t>
+            </a:r>
+            <a:endParaRPr lang="en-US" sz="3600" dirty="0"/>
+          </a:p>
+        </p:txBody>
+      </p:sp>
+      <p:sp>
+        <p:nvSpPr>
+          <p:cNvPr id="7" name="Text 5"/>
+          <p:cNvSpPr/>
+          <p:nvPr/>
+        </p:nvSpPr>
+        <p:spPr>
+          <a:xfrm>
+            <a:off x="1097280" y="3794760"/>
+            <a:ext cx="9997135" cy="457200"/>
+          </a:xfrm>
+          <a:prstGeom prst="rect">
+            <a:avLst/>
+          </a:prstGeom>
+          <a:noFill/>
+        </p:spPr>
+        <p:txBody>
+          <a:bodyPr wrap="square" lIns="0" tIns="0" rIns="0" bIns="0" rtlCol="0" anchor="ctr"/>
+          <a:lstStyle/>
+          <a:p>
+            <a:pPr marL="0" indent="0" algn="ctr">
+              <a:buNone/>
+            </a:pPr>
+            <a:r>
+              <a:rPr lang="en-US" sz="2200" b="1" dirty="0">
                 <a:solidFill>
                   <a:srgbClr val="2C2420"/>
                 </a:solidFill>
@@ -6347,73 +6776,22 @@
                 <a:ea typeface="Playfair Display" pitchFamily="34" charset="-122"/>
                 <a:cs typeface="Playfair Display" pitchFamily="34" charset="-120"/>
               </a:rPr>
-              <a:t>Poll Question Goes Here?]</a:t>
-            </a:r>
-            <a:endParaRPr lang="en-US" sz="3000" dirty="0"/>
-          </a:p>
-        </p:txBody>
-      </p:sp>
-      <p:sp>
-        <p:nvSpPr>
-          <p:cNvPr id="5" name="Shape 3"/>
-          <p:cNvSpPr/>
-          <p:nvPr/>
-        </p:nvSpPr>
-        <p:spPr>
-          <a:xfrm>
-            <a:off x="548640" y="1737360"/>
-            <a:ext cx="11094415" cy="777240"/>
-          </a:xfrm>
-          <a:prstGeom prst="rect">
-            <a:avLst/>
-          </a:prstGeom>
-          <a:solidFill>
-            <a:srgbClr val="F8F7F6"/>
-          </a:solidFill>
-          <a:ln w="12700">
-            <a:solidFill>
-              <a:srgbClr val="DFDEDD"/>
-            </a:solidFill>
-            <a:prstDash val="solid"/>
-          </a:ln>
-          <a:effectLst>
-            <a:outerShdw blurRad="76200" dist="25400" dir="5400000" algn="bl" rotWithShape="0">
-              <a:srgbClr val="000000">
-                <a:alpha val="16000"/>
-              </a:srgbClr>
-            </a:outerShdw>
-          </a:effectLst>
-        </p:spPr>
-      </p:sp>
-      <p:sp>
-        <p:nvSpPr>
-          <p:cNvPr id="6" name="Shape 4"/>
-          <p:cNvSpPr/>
-          <p:nvPr/>
-        </p:nvSpPr>
-        <p:spPr>
-          <a:xfrm>
-            <a:off x="804672" y="1906524"/>
-            <a:ext cx="548640" cy="438912"/>
-          </a:xfrm>
-          <a:prstGeom prst="rect">
-            <a:avLst/>
-          </a:prstGeom>
-          <a:solidFill>
-            <a:srgbClr val="2563EB"/>
-          </a:solidFill>
-        </p:spPr>
-      </p:sp>
-      <p:sp>
-        <p:nvSpPr>
-          <p:cNvPr id="7" name="Text 5"/>
-          <p:cNvSpPr/>
-          <p:nvPr/>
-        </p:nvSpPr>
-        <p:spPr>
-          <a:xfrm>
-            <a:off x="804672" y="1906524"/>
-            <a:ext cx="548640" cy="438912"/>
+              <a:t>Instructor content goes here</a:t>
+            </a:r>
+            <a:endParaRPr lang="en-US" sz="2200" dirty="0"/>
+          </a:p>
+        </p:txBody>
+      </p:sp>
+      <p:sp>
+        <p:nvSpPr>
+          <p:cNvPr id="8" name="Text 6"/>
+          <p:cNvSpPr/>
+          <p:nvPr/>
+        </p:nvSpPr>
+        <p:spPr>
+          <a:xfrm>
+            <a:off x="1828800" y="4343400"/>
+            <a:ext cx="8534095" cy="1097280"/>
           </a:xfrm>
           <a:prstGeom prst="rect">
             <a:avLst/>
@@ -6425,445 +6803,29 @@
           <a:lstStyle/>
           <a:p>
             <a:pPr marL="0" indent="0" algn="ctr">
+              <a:lnSpc>
+                <a:spcPct val="135000"/>
+              </a:lnSpc>
               <a:buNone/>
             </a:pPr>
             <a:r>
-              <a:rPr lang="en-US" sz="1800" b="1" dirty="0">
-                <a:solidFill>
-                  <a:srgbClr val="FFFFFF"/>
-                </a:solidFill>
-                <a:latin typeface="Inter" pitchFamily="34" charset="0"/>
-                <a:ea typeface="Inter" pitchFamily="34" charset="-122"/>
-                <a:cs typeface="Inter" pitchFamily="34" charset="-120"/>
-              </a:rPr>
-              <a:t>A</a:t>
-            </a:r>
-            <a:endParaRPr lang="en-US" sz="1800" dirty="0"/>
-          </a:p>
-        </p:txBody>
-      </p:sp>
-      <p:sp>
-        <p:nvSpPr>
-          <p:cNvPr id="8" name="Text 6"/>
-          <p:cNvSpPr/>
-          <p:nvPr/>
-        </p:nvSpPr>
-        <p:spPr>
-          <a:xfrm>
-            <a:off x="1600200" y="1737360"/>
-            <a:ext cx="9722815" cy="777240"/>
-          </a:xfrm>
-          <a:prstGeom prst="rect">
-            <a:avLst/>
-          </a:prstGeom>
-          <a:noFill/>
-        </p:spPr>
-        <p:txBody>
-          <a:bodyPr wrap="square" lIns="0" tIns="0" rIns="0" bIns="0" rtlCol="0" anchor="ctr"/>
-          <a:lstStyle/>
-          <a:p>
-            <a:pPr marL="0" indent="0">
-              <a:buNone/>
-            </a:pPr>
-            <a:r>
-              <a:rPr lang="en-US" sz="1900" dirty="0">
-                <a:solidFill>
-                  <a:srgbClr val="2C2420"/>
-                </a:solidFill>
-                <a:latin typeface="Inter" pitchFamily="34" charset="0"/>
-                <a:ea typeface="Inter" pitchFamily="34" charset="-122"/>
-                <a:cs typeface="Inter" pitchFamily="34" charset="-120"/>
-              </a:rPr>
-              <a:t>[Option A]</a:t>
-            </a:r>
-            <a:endParaRPr lang="en-US" sz="1900" dirty="0"/>
-          </a:p>
-        </p:txBody>
-      </p:sp>
-      <p:sp>
-        <p:nvSpPr>
-          <p:cNvPr id="9" name="Shape 7"/>
-          <p:cNvSpPr/>
-          <p:nvPr/>
-        </p:nvSpPr>
-        <p:spPr>
-          <a:xfrm>
-            <a:off x="548640" y="2697480"/>
-            <a:ext cx="11094415" cy="777240"/>
-          </a:xfrm>
-          <a:prstGeom prst="rect">
-            <a:avLst/>
-          </a:prstGeom>
-          <a:solidFill>
-            <a:srgbClr val="F8F7F6"/>
-          </a:solidFill>
-          <a:ln w="12700">
-            <a:solidFill>
-              <a:srgbClr val="DFDEDD"/>
-            </a:solidFill>
-            <a:prstDash val="solid"/>
-          </a:ln>
-          <a:effectLst>
-            <a:outerShdw blurRad="76200" dist="25400" dir="5400000" algn="bl" rotWithShape="0">
-              <a:srgbClr val="000000">
-                <a:alpha val="16000"/>
-              </a:srgbClr>
-            </a:outerShdw>
-          </a:effectLst>
-        </p:spPr>
-      </p:sp>
-      <p:sp>
-        <p:nvSpPr>
-          <p:cNvPr id="10" name="Shape 8"/>
-          <p:cNvSpPr/>
-          <p:nvPr/>
-        </p:nvSpPr>
-        <p:spPr>
-          <a:xfrm>
-            <a:off x="804672" y="2866644"/>
-            <a:ext cx="548640" cy="438912"/>
-          </a:xfrm>
-          <a:prstGeom prst="rect">
-            <a:avLst/>
-          </a:prstGeom>
-          <a:solidFill>
-            <a:srgbClr val="2563EB"/>
-          </a:solidFill>
-        </p:spPr>
-      </p:sp>
-      <p:sp>
-        <p:nvSpPr>
-          <p:cNvPr id="11" name="Text 9"/>
-          <p:cNvSpPr/>
-          <p:nvPr/>
-        </p:nvSpPr>
-        <p:spPr>
-          <a:xfrm>
-            <a:off x="804672" y="2866644"/>
-            <a:ext cx="548640" cy="438912"/>
-          </a:xfrm>
-          <a:prstGeom prst="rect">
-            <a:avLst/>
-          </a:prstGeom>
-          <a:noFill/>
-        </p:spPr>
-        <p:txBody>
-          <a:bodyPr wrap="square" lIns="0" tIns="0" rIns="0" bIns="0" rtlCol="0" anchor="ctr"/>
-          <a:lstStyle/>
-          <a:p>
-            <a:pPr marL="0" indent="0" algn="ctr">
-              <a:buNone/>
-            </a:pPr>
-            <a:r>
-              <a:rPr lang="en-US" sz="1800" b="1" dirty="0">
-                <a:solidFill>
-                  <a:srgbClr val="FFFFFF"/>
-                </a:solidFill>
-                <a:latin typeface="Inter" pitchFamily="34" charset="0"/>
-                <a:ea typeface="Inter" pitchFamily="34" charset="-122"/>
-                <a:cs typeface="Inter" pitchFamily="34" charset="-120"/>
-              </a:rPr>
-              <a:t>B</a:t>
-            </a:r>
-            <a:endParaRPr lang="en-US" sz="1800" dirty="0"/>
-          </a:p>
-        </p:txBody>
-      </p:sp>
-      <p:sp>
-        <p:nvSpPr>
-          <p:cNvPr id="12" name="Text 10"/>
-          <p:cNvSpPr/>
-          <p:nvPr/>
-        </p:nvSpPr>
-        <p:spPr>
-          <a:xfrm>
-            <a:off x="1600200" y="2697480"/>
-            <a:ext cx="9722815" cy="777240"/>
-          </a:xfrm>
-          <a:prstGeom prst="rect">
-            <a:avLst/>
-          </a:prstGeom>
-          <a:noFill/>
-        </p:spPr>
-        <p:txBody>
-          <a:bodyPr wrap="square" lIns="0" tIns="0" rIns="0" bIns="0" rtlCol="0" anchor="ctr"/>
-          <a:lstStyle/>
-          <a:p>
-            <a:pPr marL="0" indent="0">
-              <a:buNone/>
-            </a:pPr>
-            <a:r>
-              <a:rPr lang="en-US" sz="1900" dirty="0">
-                <a:solidFill>
-                  <a:srgbClr val="2C2420"/>
-                </a:solidFill>
-                <a:latin typeface="Inter" pitchFamily="34" charset="0"/>
-                <a:ea typeface="Inter" pitchFamily="34" charset="-122"/>
-                <a:cs typeface="Inter" pitchFamily="34" charset="-120"/>
-              </a:rPr>
-              <a:t>[Option B]</a:t>
-            </a:r>
-            <a:endParaRPr lang="en-US" sz="1900" dirty="0"/>
-          </a:p>
-        </p:txBody>
-      </p:sp>
-      <p:sp>
-        <p:nvSpPr>
-          <p:cNvPr id="13" name="Shape 11"/>
-          <p:cNvSpPr/>
-          <p:nvPr/>
-        </p:nvSpPr>
-        <p:spPr>
-          <a:xfrm>
-            <a:off x="548640" y="3657600"/>
-            <a:ext cx="11094415" cy="777240"/>
-          </a:xfrm>
-          <a:prstGeom prst="rect">
-            <a:avLst/>
-          </a:prstGeom>
-          <a:solidFill>
-            <a:srgbClr val="F8F7F6"/>
-          </a:solidFill>
-          <a:ln w="12700">
-            <a:solidFill>
-              <a:srgbClr val="DFDEDD"/>
-            </a:solidFill>
-            <a:prstDash val="solid"/>
-          </a:ln>
-          <a:effectLst>
-            <a:outerShdw blurRad="76200" dist="25400" dir="5400000" algn="bl" rotWithShape="0">
-              <a:srgbClr val="000000">
-                <a:alpha val="16000"/>
-              </a:srgbClr>
-            </a:outerShdw>
-          </a:effectLst>
-        </p:spPr>
-      </p:sp>
-      <p:sp>
-        <p:nvSpPr>
-          <p:cNvPr id="14" name="Shape 12"/>
-          <p:cNvSpPr/>
-          <p:nvPr/>
-        </p:nvSpPr>
-        <p:spPr>
-          <a:xfrm>
-            <a:off x="804672" y="3826764"/>
-            <a:ext cx="548640" cy="438912"/>
-          </a:xfrm>
-          <a:prstGeom prst="rect">
-            <a:avLst/>
-          </a:prstGeom>
-          <a:solidFill>
-            <a:srgbClr val="2563EB"/>
-          </a:solidFill>
-        </p:spPr>
-      </p:sp>
-      <p:sp>
-        <p:nvSpPr>
-          <p:cNvPr id="15" name="Text 13"/>
-          <p:cNvSpPr/>
-          <p:nvPr/>
-        </p:nvSpPr>
-        <p:spPr>
-          <a:xfrm>
-            <a:off x="804672" y="3826764"/>
-            <a:ext cx="548640" cy="438912"/>
-          </a:xfrm>
-          <a:prstGeom prst="rect">
-            <a:avLst/>
-          </a:prstGeom>
-          <a:noFill/>
-        </p:spPr>
-        <p:txBody>
-          <a:bodyPr wrap="square" lIns="0" tIns="0" rIns="0" bIns="0" rtlCol="0" anchor="ctr"/>
-          <a:lstStyle/>
-          <a:p>
-            <a:pPr marL="0" indent="0" algn="ctr">
-              <a:buNone/>
-            </a:pPr>
-            <a:r>
-              <a:rPr lang="en-US" sz="1800" b="1" dirty="0">
-                <a:solidFill>
-                  <a:srgbClr val="FFFFFF"/>
-                </a:solidFill>
-                <a:latin typeface="Inter" pitchFamily="34" charset="0"/>
-                <a:ea typeface="Inter" pitchFamily="34" charset="-122"/>
-                <a:cs typeface="Inter" pitchFamily="34" charset="-120"/>
-              </a:rPr>
-              <a:t>C</a:t>
-            </a:r>
-            <a:endParaRPr lang="en-US" sz="1800" dirty="0"/>
-          </a:p>
-        </p:txBody>
-      </p:sp>
-      <p:sp>
-        <p:nvSpPr>
-          <p:cNvPr id="16" name="Text 14"/>
-          <p:cNvSpPr/>
-          <p:nvPr/>
-        </p:nvSpPr>
-        <p:spPr>
-          <a:xfrm>
-            <a:off x="1600200" y="3657600"/>
-            <a:ext cx="9722815" cy="777240"/>
-          </a:xfrm>
-          <a:prstGeom prst="rect">
-            <a:avLst/>
-          </a:prstGeom>
-          <a:noFill/>
-        </p:spPr>
-        <p:txBody>
-          <a:bodyPr wrap="square" lIns="0" tIns="0" rIns="0" bIns="0" rtlCol="0" anchor="ctr"/>
-          <a:lstStyle/>
-          <a:p>
-            <a:pPr marL="0" indent="0">
-              <a:buNone/>
-            </a:pPr>
-            <a:r>
-              <a:rPr lang="en-US" sz="1900" dirty="0">
-                <a:solidFill>
-                  <a:srgbClr val="2C2420"/>
-                </a:solidFill>
-                <a:latin typeface="Inter" pitchFamily="34" charset="0"/>
-                <a:ea typeface="Inter" pitchFamily="34" charset="-122"/>
-                <a:cs typeface="Inter" pitchFamily="34" charset="-120"/>
-              </a:rPr>
-              <a:t>[Option C]</a:t>
-            </a:r>
-            <a:endParaRPr lang="en-US" sz="1900" dirty="0"/>
-          </a:p>
-        </p:txBody>
-      </p:sp>
-      <p:sp>
-        <p:nvSpPr>
-          <p:cNvPr id="17" name="Shape 15"/>
-          <p:cNvSpPr/>
-          <p:nvPr/>
-        </p:nvSpPr>
-        <p:spPr>
-          <a:xfrm>
-            <a:off x="548640" y="4617720"/>
-            <a:ext cx="11094415" cy="777240"/>
-          </a:xfrm>
-          <a:prstGeom prst="rect">
-            <a:avLst/>
-          </a:prstGeom>
-          <a:solidFill>
-            <a:srgbClr val="F8F7F6"/>
-          </a:solidFill>
-          <a:ln w="12700">
-            <a:solidFill>
-              <a:srgbClr val="DFDEDD"/>
-            </a:solidFill>
-            <a:prstDash val="solid"/>
-          </a:ln>
-          <a:effectLst>
-            <a:outerShdw blurRad="76200" dist="25400" dir="5400000" algn="bl" rotWithShape="0">
-              <a:srgbClr val="000000">
-                <a:alpha val="16000"/>
-              </a:srgbClr>
-            </a:outerShdw>
-          </a:effectLst>
-        </p:spPr>
-      </p:sp>
-      <p:sp>
-        <p:nvSpPr>
-          <p:cNvPr id="18" name="Shape 16"/>
-          <p:cNvSpPr/>
-          <p:nvPr/>
-        </p:nvSpPr>
-        <p:spPr>
-          <a:xfrm>
-            <a:off x="804672" y="4786884"/>
-            <a:ext cx="548640" cy="438912"/>
-          </a:xfrm>
-          <a:prstGeom prst="rect">
-            <a:avLst/>
-          </a:prstGeom>
-          <a:solidFill>
-            <a:srgbClr val="2563EB"/>
-          </a:solidFill>
-        </p:spPr>
-      </p:sp>
-      <p:sp>
-        <p:nvSpPr>
-          <p:cNvPr id="19" name="Text 17"/>
-          <p:cNvSpPr/>
-          <p:nvPr/>
-        </p:nvSpPr>
-        <p:spPr>
-          <a:xfrm>
-            <a:off x="804672" y="4786884"/>
-            <a:ext cx="548640" cy="438912"/>
-          </a:xfrm>
-          <a:prstGeom prst="rect">
-            <a:avLst/>
-          </a:prstGeom>
-          <a:noFill/>
-        </p:spPr>
-        <p:txBody>
-          <a:bodyPr wrap="square" lIns="0" tIns="0" rIns="0" bIns="0" rtlCol="0" anchor="ctr"/>
-          <a:lstStyle/>
-          <a:p>
-            <a:pPr marL="0" indent="0" algn="ctr">
-              <a:buNone/>
-            </a:pPr>
-            <a:r>
-              <a:rPr lang="en-US" sz="1800" b="1" dirty="0">
-                <a:solidFill>
-                  <a:srgbClr val="FFFFFF"/>
-                </a:solidFill>
-                <a:latin typeface="Inter" pitchFamily="34" charset="0"/>
-                <a:ea typeface="Inter" pitchFamily="34" charset="-122"/>
-                <a:cs typeface="Inter" pitchFamily="34" charset="-120"/>
-              </a:rPr>
-              <a:t>D</a:t>
-            </a:r>
-            <a:endParaRPr lang="en-US" sz="1800" dirty="0"/>
-          </a:p>
-        </p:txBody>
-      </p:sp>
-      <p:sp>
-        <p:nvSpPr>
-          <p:cNvPr id="20" name="Text 18"/>
-          <p:cNvSpPr/>
-          <p:nvPr/>
-        </p:nvSpPr>
-        <p:spPr>
-          <a:xfrm>
-            <a:off x="1600200" y="4617720"/>
-            <a:ext cx="9722815" cy="777240"/>
-          </a:xfrm>
-          <a:prstGeom prst="rect">
-            <a:avLst/>
-          </a:prstGeom>
-          <a:noFill/>
-        </p:spPr>
-        <p:txBody>
-          <a:bodyPr wrap="square" lIns="0" tIns="0" rIns="0" bIns="0" rtlCol="0" anchor="ctr"/>
-          <a:lstStyle/>
-          <a:p>
-            <a:pPr marL="0" indent="0">
-              <a:buNone/>
-            </a:pPr>
-            <a:r>
-              <a:rPr lang="en-US" sz="1900" dirty="0">
-                <a:solidFill>
-                  <a:srgbClr val="2C2420"/>
-                </a:solidFill>
-                <a:latin typeface="Inter" pitchFamily="34" charset="0"/>
-                <a:ea typeface="Inter" pitchFamily="34" charset="-122"/>
-                <a:cs typeface="Inter" pitchFamily="34" charset="-120"/>
-              </a:rPr>
-              <a:t>[Option D]</a:t>
-            </a:r>
-            <a:endParaRPr lang="en-US" sz="1900" dirty="0"/>
-          </a:p>
-        </p:txBody>
-      </p:sp>
-      <p:sp>
-        <p:nvSpPr>
-          <p:cNvPr id="21" name="Text 19"/>
+              <a:rPr lang="en-US" sz="2000" dirty="0">
+                <a:solidFill>
+                  <a:srgbClr val="6B6663"/>
+                </a:solidFill>
+                <a:latin typeface="Inter" pitchFamily="34" charset="0"/>
+                <a:ea typeface="Inter" pitchFamily="34" charset="-122"/>
+                <a:cs typeface="Inter" pitchFamily="34" charset="-120"/>
+              </a:rPr>
+              <a:t>[Add your own slides, diagrams, code, or speaking notes for this section of the lecture.]</a:t>
+            </a:r>
+            <a:endParaRPr lang="en-US" sz="2000" dirty="0"/>
+          </a:p>
+        </p:txBody>
+      </p:sp>
+      <p:sp>
+        <p:nvSpPr>
+          <p:cNvPr id="9" name="Text 7"/>
           <p:cNvSpPr/>
           <p:nvPr/>
         </p:nvSpPr>
@@ -6893,592 +6855,7 @@
                 <a:ea typeface="Inter" pitchFamily="34" charset="-122"/>
                 <a:cs typeface="Inter" pitchFamily="34" charset="-120"/>
               </a:rPr>
-              <a:t>TEMPLATE  ·  live_poll</a:t>
-            </a:r>
-            <a:endParaRPr lang="en-US" sz="850" dirty="0"/>
-          </a:p>
-        </p:txBody>
-      </p:sp>
-    </p:spTree>
-  </p:cSld>
-  <p:clrMapOvr>
-    <a:masterClrMapping/>
-  </p:clrMapOvr>
-</p:sld>
-</file>
-
-<file path=ppt/slides/slide9.xml><?xml version="1.0" encoding="utf-8"?>
-<p:sld xmlns:a="http://schemas.openxmlformats.org/drawingml/2006/main" xmlns:r="http://schemas.openxmlformats.org/officeDocument/2006/relationships" xmlns:p="http://schemas.openxmlformats.org/presentationml/2006/main">
-  <p:cSld>
-    <p:spTree>
-      <p:nvGrpSpPr>
-        <p:cNvPr id="1" name=""/>
-        <p:cNvGrpSpPr/>
-        <p:nvPr/>
-      </p:nvGrpSpPr>
-      <p:grpSpPr>
-        <a:xfrm>
-          <a:off x="0" y="0"/>
-          <a:ext cx="0" cy="0"/>
-          <a:chOff x="0" y="0"/>
-          <a:chExt cx="0" cy="0"/>
-        </a:xfrm>
-      </p:grpSpPr>
-      <p:sp>
-        <p:nvSpPr>
-          <p:cNvPr id="2" name="Shape 0"/>
-          <p:cNvSpPr/>
-          <p:nvPr/>
-        </p:nvSpPr>
-        <p:spPr>
-          <a:xfrm>
-            <a:off x="0" y="0"/>
-            <a:ext cx="82296" cy="6858000"/>
-          </a:xfrm>
-          <a:prstGeom prst="rect">
-            <a:avLst/>
-          </a:prstGeom>
-          <a:solidFill>
-            <a:srgbClr val="6D28D9"/>
-          </a:solidFill>
-        </p:spPr>
-      </p:sp>
-      <p:sp>
-        <p:nvSpPr>
-          <p:cNvPr id="3" name="Text 1"/>
-          <p:cNvSpPr/>
-          <p:nvPr/>
-        </p:nvSpPr>
-        <p:spPr>
-          <a:xfrm>
-            <a:off x="548640" y="457200"/>
-            <a:ext cx="11094415" cy="292608"/>
-          </a:xfrm>
-          <a:prstGeom prst="rect">
-            <a:avLst/>
-          </a:prstGeom>
-          <a:noFill/>
-        </p:spPr>
-        <p:txBody>
-          <a:bodyPr wrap="square" lIns="0" tIns="0" rIns="0" bIns="0" rtlCol="0" anchor="t"/>
-          <a:lstStyle/>
-          <a:p>
-            <a:pPr marL="0" indent="0">
-              <a:buNone/>
-            </a:pPr>
-            <a:r>
-              <a:rPr lang="en-US" sz="1600" b="1" kern="0" spc="150" dirty="0">
-                <a:solidFill>
-                  <a:srgbClr val="6D28D9"/>
-                </a:solidFill>
-                <a:latin typeface="Inter" pitchFamily="34" charset="0"/>
-                <a:ea typeface="Inter" pitchFamily="34" charset="-122"/>
-                <a:cs typeface="Inter" pitchFamily="34" charset="-120"/>
-                <a:sym typeface="+mn-ea"/>
-              </a:rPr>
-              <a:t>🔄 DEBRIEF - </a:t>
-            </a:r>
-            <a:r>
-              <a:rPr lang="en-US" sz="1600" b="1" kern="0" spc="150" dirty="0">
-                <a:solidFill>
-                  <a:srgbClr val="6D28D9"/>
-                </a:solidFill>
-                <a:latin typeface="Inter" pitchFamily="34" charset="0"/>
-                <a:ea typeface="Inter" pitchFamily="34" charset="-122"/>
-                <a:cs typeface="Inter" pitchFamily="34" charset="-120"/>
-              </a:rPr>
-              <a:t>[PHASE]</a:t>
-            </a:r>
-            <a:endParaRPr lang="en-US" sz="1600" dirty="0"/>
-          </a:p>
-        </p:txBody>
-      </p:sp>
-      <p:sp>
-        <p:nvSpPr>
-          <p:cNvPr id="4" name="Text 2"/>
-          <p:cNvSpPr/>
-          <p:nvPr/>
-        </p:nvSpPr>
-        <p:spPr>
-          <a:xfrm>
-            <a:off x="548640" y="768096"/>
-            <a:ext cx="11094415" cy="822960"/>
-          </a:xfrm>
-          <a:prstGeom prst="rect">
-            <a:avLst/>
-          </a:prstGeom>
-          <a:noFill/>
-        </p:spPr>
-        <p:txBody>
-          <a:bodyPr wrap="square" lIns="0" tIns="0" rIns="0" bIns="0" rtlCol="0" anchor="t"/>
-          <a:lstStyle/>
-          <a:p>
-            <a:pPr marL="0" indent="0">
-              <a:lnSpc>
-                <a:spcPct val="105000"/>
-              </a:lnSpc>
-              <a:buNone/>
-            </a:pPr>
-            <a:endParaRPr lang="en-US" sz="3000" dirty="0"/>
-          </a:p>
-        </p:txBody>
-      </p:sp>
-      <p:sp>
-        <p:nvSpPr>
-          <p:cNvPr id="5" name="Shape 3"/>
-          <p:cNvSpPr/>
-          <p:nvPr/>
-        </p:nvSpPr>
-        <p:spPr>
-          <a:xfrm>
-            <a:off x="548640" y="915035"/>
-            <a:ext cx="11094720" cy="2102485"/>
-          </a:xfrm>
-          <a:prstGeom prst="rect">
-            <a:avLst/>
-          </a:prstGeom>
-          <a:solidFill>
-            <a:srgbClr val="F8F7F6"/>
-          </a:solidFill>
-          <a:ln w="12700">
-            <a:solidFill>
-              <a:srgbClr val="DFDEDD"/>
-            </a:solidFill>
-            <a:prstDash val="solid"/>
-          </a:ln>
-          <a:effectLst>
-            <a:outerShdw blurRad="76200" dist="25400" dir="5400000" algn="bl" rotWithShape="0">
-              <a:srgbClr val="000000">
-                <a:alpha val="16000"/>
-              </a:srgbClr>
-            </a:outerShdw>
-          </a:effectLst>
-        </p:spPr>
-      </p:sp>
-      <p:sp>
-        <p:nvSpPr>
-          <p:cNvPr id="6" name="Shape 4"/>
-          <p:cNvSpPr/>
-          <p:nvPr/>
-        </p:nvSpPr>
-        <p:spPr>
-          <a:xfrm>
-            <a:off x="548640" y="915670"/>
-            <a:ext cx="76200" cy="2101850"/>
-          </a:xfrm>
-          <a:prstGeom prst="rect">
-            <a:avLst/>
-          </a:prstGeom>
-          <a:solidFill>
-            <a:srgbClr val="6D28D9"/>
-          </a:solidFill>
-        </p:spPr>
-      </p:sp>
-      <p:sp>
-        <p:nvSpPr>
-          <p:cNvPr id="7" name="Text 5"/>
-          <p:cNvSpPr/>
-          <p:nvPr/>
-        </p:nvSpPr>
-        <p:spPr>
-          <a:xfrm>
-            <a:off x="749808" y="1101471"/>
-            <a:ext cx="10692079" cy="274320"/>
-          </a:xfrm>
-          <a:prstGeom prst="rect">
-            <a:avLst/>
-          </a:prstGeom>
-          <a:noFill/>
-        </p:spPr>
-        <p:txBody>
-          <a:bodyPr wrap="square" lIns="0" tIns="0" rIns="0" bIns="0" rtlCol="0" anchor="t"/>
-          <a:lstStyle/>
-          <a:p>
-            <a:pPr marL="0" indent="0">
-              <a:buNone/>
-            </a:pPr>
-            <a:r>
-              <a:rPr lang="en-US" sz="1600" b="1" kern="0" spc="50" dirty="0">
-                <a:solidFill>
-                  <a:srgbClr val="6D28D9"/>
-                </a:solidFill>
-                <a:latin typeface="Inter" pitchFamily="34" charset="0"/>
-                <a:ea typeface="Inter" pitchFamily="34" charset="-122"/>
-                <a:cs typeface="Inter" pitchFamily="34" charset="-120"/>
-              </a:rPr>
-              <a:t>SUGGESTED ANSWER</a:t>
-            </a:r>
-            <a:endParaRPr lang="en-US" sz="1600" dirty="0"/>
-          </a:p>
-        </p:txBody>
-      </p:sp>
-      <p:sp>
-        <p:nvSpPr>
-          <p:cNvPr id="8" name="Text 6"/>
-          <p:cNvSpPr/>
-          <p:nvPr/>
-        </p:nvSpPr>
-        <p:spPr>
-          <a:xfrm>
-            <a:off x="749808" y="1465453"/>
-            <a:ext cx="10692079" cy="777240"/>
-          </a:xfrm>
-          <a:prstGeom prst="rect">
-            <a:avLst/>
-          </a:prstGeom>
-          <a:noFill/>
-        </p:spPr>
-        <p:txBody>
-          <a:bodyPr wrap="square" lIns="0" tIns="0" rIns="0" bIns="0" rtlCol="0" anchor="t"/>
-          <a:lstStyle/>
-          <a:p>
-            <a:pPr marL="0" indent="0">
-              <a:lnSpc>
-                <a:spcPct val="130000"/>
-              </a:lnSpc>
-              <a:buNone/>
-            </a:pPr>
-            <a:r>
-              <a:rPr lang="en-US" dirty="0">
-                <a:solidFill>
-                  <a:srgbClr val="2C2420"/>
-                </a:solidFill>
-                <a:latin typeface="Inter" pitchFamily="34" charset="0"/>
-                <a:ea typeface="Inter" pitchFamily="34" charset="-122"/>
-                <a:cs typeface="Inter" pitchFamily="34" charset="-120"/>
-              </a:rPr>
-              <a:t>[Summarize the correct answer or ideal response to the activity prompt, so you can compare it against what groups came up with.]</a:t>
-            </a:r>
-            <a:endParaRPr lang="en-US" dirty="0"/>
-          </a:p>
-        </p:txBody>
-      </p:sp>
-      <p:sp>
-        <p:nvSpPr>
-          <p:cNvPr id="9" name="Shape 7"/>
-          <p:cNvSpPr/>
-          <p:nvPr/>
-        </p:nvSpPr>
-        <p:spPr>
-          <a:xfrm>
-            <a:off x="548640" y="3246120"/>
-            <a:ext cx="5432908" cy="2788920"/>
-          </a:xfrm>
-          <a:prstGeom prst="rect">
-            <a:avLst/>
-          </a:prstGeom>
-          <a:solidFill>
-            <a:srgbClr val="F8F7F6"/>
-          </a:solidFill>
-          <a:ln w="12700">
-            <a:solidFill>
-              <a:srgbClr val="DFDEDD"/>
-            </a:solidFill>
-            <a:prstDash val="solid"/>
-          </a:ln>
-          <a:effectLst>
-            <a:outerShdw blurRad="76200" dist="25400" dir="5400000" algn="bl" rotWithShape="0">
-              <a:srgbClr val="000000">
-                <a:alpha val="16000"/>
-              </a:srgbClr>
-            </a:outerShdw>
-          </a:effectLst>
-        </p:spPr>
-      </p:sp>
-      <p:sp>
-        <p:nvSpPr>
-          <p:cNvPr id="10" name="Text 8"/>
-          <p:cNvSpPr/>
-          <p:nvPr/>
-        </p:nvSpPr>
-        <p:spPr>
-          <a:xfrm>
-            <a:off x="749808" y="3374136"/>
-            <a:ext cx="5030572" cy="274320"/>
-          </a:xfrm>
-          <a:prstGeom prst="rect">
-            <a:avLst/>
-          </a:prstGeom>
-          <a:noFill/>
-        </p:spPr>
-        <p:txBody>
-          <a:bodyPr wrap="square" lIns="0" tIns="0" rIns="0" bIns="0" rtlCol="0" anchor="t"/>
-          <a:lstStyle/>
-          <a:p>
-            <a:pPr marL="0" indent="0">
-              <a:buNone/>
-            </a:pPr>
-            <a:r>
-              <a:rPr lang="en-US" sz="1600" b="1" kern="0" spc="50" dirty="0">
-                <a:solidFill>
-                  <a:srgbClr val="6D28D9"/>
-                </a:solidFill>
-                <a:latin typeface="Inter" pitchFamily="34" charset="0"/>
-                <a:ea typeface="Inter" pitchFamily="34" charset="-122"/>
-                <a:cs typeface="Inter" pitchFamily="34" charset="-120"/>
-              </a:rPr>
-              <a:t>COMMON MISCONCEPTIONS</a:t>
-            </a:r>
-            <a:endParaRPr lang="en-US" sz="1600" dirty="0"/>
-          </a:p>
-        </p:txBody>
-      </p:sp>
-      <p:sp>
-        <p:nvSpPr>
-          <p:cNvPr id="11" name="Text 9"/>
-          <p:cNvSpPr/>
-          <p:nvPr/>
-        </p:nvSpPr>
-        <p:spPr>
-          <a:xfrm>
-            <a:off x="749808" y="3749040"/>
-            <a:ext cx="5030572" cy="2103120"/>
-          </a:xfrm>
-          <a:prstGeom prst="rect">
-            <a:avLst/>
-          </a:prstGeom>
-          <a:noFill/>
-        </p:spPr>
-        <p:txBody>
-          <a:bodyPr wrap="square" lIns="0" tIns="0" rIns="0" bIns="0" rtlCol="0" anchor="t"/>
-          <a:lstStyle/>
-          <a:p>
-            <a:pPr marL="342900" indent="-342900">
-              <a:lnSpc>
-                <a:spcPct val="125000"/>
-              </a:lnSpc>
-              <a:spcAft>
-                <a:spcPts val="800"/>
-              </a:spcAft>
-              <a:buSzPct val="100000"/>
-              <a:buChar char="•"/>
-            </a:pPr>
-            <a:r>
-              <a:rPr lang="en-US" sz="1600" dirty="0">
-                <a:solidFill>
-                  <a:srgbClr val="2C2420"/>
-                </a:solidFill>
-                <a:latin typeface="Inter" pitchFamily="34" charset="0"/>
-                <a:ea typeface="Inter" pitchFamily="34" charset="-122"/>
-                <a:cs typeface="Inter" pitchFamily="34" charset="-120"/>
-              </a:rPr>
-              <a:t>[Misconception participants often have]</a:t>
-            </a:r>
-            <a:endParaRPr lang="en-US" sz="1600" dirty="0"/>
-          </a:p>
-          <a:p>
-            <a:pPr marL="342900" indent="-342900">
-              <a:lnSpc>
-                <a:spcPct val="125000"/>
-              </a:lnSpc>
-              <a:spcAft>
-                <a:spcPts val="800"/>
-              </a:spcAft>
-              <a:buSzPct val="100000"/>
-              <a:buChar char="•"/>
-            </a:pPr>
-            <a:r>
-              <a:rPr lang="en-US" sz="1600" dirty="0">
-                <a:solidFill>
-                  <a:srgbClr val="2C2420"/>
-                </a:solidFill>
-                <a:latin typeface="Inter" pitchFamily="34" charset="0"/>
-                <a:ea typeface="Inter" pitchFamily="34" charset="-122"/>
-                <a:cs typeface="Inter" pitchFamily="34" charset="-120"/>
-              </a:rPr>
-              <a:t>[A second common mistake or gap]</a:t>
-            </a:r>
-            <a:endParaRPr lang="en-US" sz="1600" dirty="0"/>
-          </a:p>
-          <a:p>
-            <a:pPr marL="342900" indent="-342900">
-              <a:lnSpc>
-                <a:spcPct val="125000"/>
-              </a:lnSpc>
-              <a:spcAft>
-                <a:spcPts val="800"/>
-              </a:spcAft>
-              <a:buSzPct val="100000"/>
-              <a:buChar char="•"/>
-            </a:pPr>
-            <a:r>
-              <a:rPr lang="en-US" sz="1600" dirty="0">
-                <a:solidFill>
-                  <a:srgbClr val="2C2420"/>
-                </a:solidFill>
-                <a:latin typeface="Inter" pitchFamily="34" charset="0"/>
-                <a:ea typeface="Inter" pitchFamily="34" charset="-122"/>
-                <a:cs typeface="Inter" pitchFamily="34" charset="-120"/>
-              </a:rPr>
-              <a:t>[Why this misconception happens]</a:t>
-            </a:r>
-            <a:endParaRPr lang="en-US" sz="1600" dirty="0"/>
-          </a:p>
-        </p:txBody>
-      </p:sp>
-      <p:sp>
-        <p:nvSpPr>
-          <p:cNvPr id="12" name="Shape 10"/>
-          <p:cNvSpPr/>
-          <p:nvPr/>
-        </p:nvSpPr>
-        <p:spPr>
-          <a:xfrm>
-            <a:off x="6210148" y="3246120"/>
-            <a:ext cx="5432908" cy="2788920"/>
-          </a:xfrm>
-          <a:prstGeom prst="rect">
-            <a:avLst/>
-          </a:prstGeom>
-          <a:solidFill>
-            <a:srgbClr val="F8F7F6"/>
-          </a:solidFill>
-          <a:ln w="12700">
-            <a:solidFill>
-              <a:srgbClr val="DFDEDD"/>
-            </a:solidFill>
-            <a:prstDash val="solid"/>
-          </a:ln>
-          <a:effectLst>
-            <a:outerShdw blurRad="76200" dist="25400" dir="5400000" algn="bl" rotWithShape="0">
-              <a:srgbClr val="000000">
-                <a:alpha val="16000"/>
-              </a:srgbClr>
-            </a:outerShdw>
-          </a:effectLst>
-        </p:spPr>
-      </p:sp>
-      <p:sp>
-        <p:nvSpPr>
-          <p:cNvPr id="13" name="Shape 11"/>
-          <p:cNvSpPr/>
-          <p:nvPr/>
-        </p:nvSpPr>
-        <p:spPr>
-          <a:xfrm>
-            <a:off x="6210148" y="3246120"/>
-            <a:ext cx="41148" cy="2788920"/>
-          </a:xfrm>
-          <a:prstGeom prst="rect">
-            <a:avLst/>
-          </a:prstGeom>
-          <a:solidFill>
-            <a:srgbClr val="865C1D"/>
-          </a:solidFill>
-        </p:spPr>
-      </p:sp>
-      <p:sp>
-        <p:nvSpPr>
-          <p:cNvPr id="14" name="Text 12"/>
-          <p:cNvSpPr/>
-          <p:nvPr/>
-        </p:nvSpPr>
-        <p:spPr>
-          <a:xfrm>
-            <a:off x="6411316" y="3374136"/>
-            <a:ext cx="5030572" cy="274320"/>
-          </a:xfrm>
-          <a:prstGeom prst="rect">
-            <a:avLst/>
-          </a:prstGeom>
-          <a:noFill/>
-        </p:spPr>
-        <p:txBody>
-          <a:bodyPr wrap="square" lIns="0" tIns="0" rIns="0" bIns="0" rtlCol="0" anchor="t"/>
-          <a:lstStyle/>
-          <a:p>
-            <a:pPr marL="0" indent="0">
-              <a:buNone/>
-            </a:pPr>
-            <a:r>
-              <a:rPr lang="en-US" sz="1600" b="1" kern="0" spc="50" dirty="0">
-                <a:solidFill>
-                  <a:srgbClr val="865C1D"/>
-                </a:solidFill>
-                <a:latin typeface="Inter" pitchFamily="34" charset="0"/>
-                <a:ea typeface="Inter" pitchFamily="34" charset="-122"/>
-                <a:cs typeface="Inter" pitchFamily="34" charset="-120"/>
-              </a:rPr>
-              <a:t>KEY TAKEAWAY</a:t>
-            </a:r>
-            <a:endParaRPr lang="en-US" sz="1600" dirty="0"/>
-          </a:p>
-        </p:txBody>
-      </p:sp>
-      <p:sp>
-        <p:nvSpPr>
-          <p:cNvPr id="15" name="Text 13"/>
-          <p:cNvSpPr/>
-          <p:nvPr/>
-        </p:nvSpPr>
-        <p:spPr>
-          <a:xfrm>
-            <a:off x="6411316" y="3749040"/>
-            <a:ext cx="5030572" cy="2103120"/>
-          </a:xfrm>
-          <a:prstGeom prst="rect">
-            <a:avLst/>
-          </a:prstGeom>
-          <a:noFill/>
-        </p:spPr>
-        <p:txBody>
-          <a:bodyPr wrap="square" lIns="0" tIns="0" rIns="0" bIns="0" rtlCol="0" anchor="t"/>
-          <a:lstStyle/>
-          <a:p>
-            <a:pPr marL="0" indent="0">
-              <a:lnSpc>
-                <a:spcPct val="130000"/>
-              </a:lnSpc>
-              <a:buNone/>
-            </a:pPr>
-            <a:r>
-              <a:rPr lang="en-US" sz="1600" dirty="0">
-                <a:solidFill>
-                  <a:srgbClr val="2C2420"/>
-                </a:solidFill>
-                <a:latin typeface="Inter" pitchFamily="34" charset="0"/>
-                <a:ea typeface="Inter" pitchFamily="34" charset="-122"/>
-                <a:cs typeface="Inter" pitchFamily="34" charset="-120"/>
-              </a:rPr>
-              <a:t>[State the one main insight participants should leave with, and tie it explicitly back to the learning goal for this section.]</a:t>
-            </a:r>
-            <a:endParaRPr lang="en-US" sz="1600" dirty="0"/>
-          </a:p>
-        </p:txBody>
-      </p:sp>
-      <p:sp>
-        <p:nvSpPr>
-          <p:cNvPr id="16" name="Text 14"/>
-          <p:cNvSpPr/>
-          <p:nvPr/>
-        </p:nvSpPr>
-        <p:spPr>
-          <a:xfrm>
-            <a:off x="8899855" y="6473952"/>
-            <a:ext cx="3108960" cy="274320"/>
-          </a:xfrm>
-          <a:prstGeom prst="rect">
-            <a:avLst/>
-          </a:prstGeom>
-          <a:noFill/>
-        </p:spPr>
-        <p:txBody>
-          <a:bodyPr wrap="square" lIns="0" tIns="0" rIns="0" bIns="0" rtlCol="0" anchor="ctr"/>
-          <a:lstStyle/>
-          <a:p>
-            <a:pPr marL="0" indent="0" algn="r">
-              <a:buNone/>
-            </a:pPr>
-            <a:r>
-              <a:rPr lang="en-US" sz="850" kern="0" spc="50" dirty="0">
-                <a:solidFill>
-                  <a:srgbClr val="6B6663"/>
-                </a:solidFill>
-                <a:latin typeface="Inter" pitchFamily="34" charset="0"/>
-                <a:ea typeface="Inter" pitchFamily="34" charset="-122"/>
-                <a:cs typeface="Inter" pitchFamily="34" charset="-120"/>
-              </a:rPr>
-              <a:t>TEMPLATE  ·  debrief</a:t>
+              <a:t>TEMPLATE  ·  lecture_placeholder</a:t>
             </a:r>
             <a:endParaRPr lang="en-US" sz="850" dirty="0"/>
           </a:p>
